--- a/slides/defense.pptx
+++ b/slides/defense.pptx
@@ -5,7 +5,7 @@
     <p:sldMasterId id="2147483648" r:id="rId1"/>
   </p:sldMasterIdLst>
   <p:notesMasterIdLst>
-    <p:notesMasterId r:id="rId17"/>
+    <p:notesMasterId r:id="rId18"/>
   </p:notesMasterIdLst>
   <p:sldIdLst>
     <p:sldId id="271" r:id="rId2"/>
@@ -17,12 +17,13 @@
     <p:sldId id="276" r:id="rId8"/>
     <p:sldId id="277" r:id="rId9"/>
     <p:sldId id="278" r:id="rId10"/>
-    <p:sldId id="280" r:id="rId11"/>
-    <p:sldId id="281" r:id="rId12"/>
-    <p:sldId id="282" r:id="rId13"/>
-    <p:sldId id="283" r:id="rId14"/>
-    <p:sldId id="279" r:id="rId15"/>
-    <p:sldId id="284" r:id="rId16"/>
+    <p:sldId id="286" r:id="rId11"/>
+    <p:sldId id="280" r:id="rId12"/>
+    <p:sldId id="281" r:id="rId13"/>
+    <p:sldId id="282" r:id="rId14"/>
+    <p:sldId id="283" r:id="rId15"/>
+    <p:sldId id="279" r:id="rId16"/>
+    <p:sldId id="284" r:id="rId17"/>
   </p:sldIdLst>
   <p:sldSz cx="12192000" cy="6858000"/>
   <p:notesSz cx="6858000" cy="9144000"/>
@@ -211,7 +212,7 @@
           <a:p>
             <a:fld id="{14C4D81D-654F-48DB-A33D-3E6F325A1010}" type="datetimeFigureOut">
               <a:rPr lang="ru-RU" smtClean="0"/>
-              <a:t>19.03.2026</a:t>
+              <a:t>26.03.2026</a:t>
             </a:fld>
             <a:endParaRPr lang="ru-RU"/>
           </a:p>
@@ -636,7 +637,7 @@
     </p:spTree>
     <p:extLst>
       <p:ext uri="{BB962C8B-B14F-4D97-AF65-F5344CB8AC3E}">
-        <p14:creationId xmlns:p14="http://schemas.microsoft.com/office/powerpoint/2010/main" val="1449307840"/>
+        <p14:creationId xmlns:p14="http://schemas.microsoft.com/office/powerpoint/2010/main" val="3048732540"/>
       </p:ext>
     </p:extLst>
   </p:cSld>
@@ -720,7 +721,7 @@
     </p:spTree>
     <p:extLst>
       <p:ext uri="{BB962C8B-B14F-4D97-AF65-F5344CB8AC3E}">
-        <p14:creationId xmlns:p14="http://schemas.microsoft.com/office/powerpoint/2010/main" val="494346914"/>
+        <p14:creationId xmlns:p14="http://schemas.microsoft.com/office/powerpoint/2010/main" val="1449307840"/>
       </p:ext>
     </p:extLst>
   </p:cSld>
@@ -804,7 +805,7 @@
     </p:spTree>
     <p:extLst>
       <p:ext uri="{BB962C8B-B14F-4D97-AF65-F5344CB8AC3E}">
-        <p14:creationId xmlns:p14="http://schemas.microsoft.com/office/powerpoint/2010/main" val="462358110"/>
+        <p14:creationId xmlns:p14="http://schemas.microsoft.com/office/powerpoint/2010/main" val="494346914"/>
       </p:ext>
     </p:extLst>
   </p:cSld>
@@ -888,7 +889,7 @@
     </p:spTree>
     <p:extLst>
       <p:ext uri="{BB962C8B-B14F-4D97-AF65-F5344CB8AC3E}">
-        <p14:creationId xmlns:p14="http://schemas.microsoft.com/office/powerpoint/2010/main" val="830339915"/>
+        <p14:creationId xmlns:p14="http://schemas.microsoft.com/office/powerpoint/2010/main" val="462358110"/>
       </p:ext>
     </p:extLst>
   </p:cSld>
@@ -964,6 +965,90 @@
             <a:fld id="{DD093330-6B9A-4C0D-8499-7E41F07687EA}" type="slidenum">
               <a:rPr lang="ru-RU" smtClean="0"/>
               <a:t>15</a:t>
+            </a:fld>
+            <a:endParaRPr lang="ru-RU"/>
+          </a:p>
+        </p:txBody>
+      </p:sp>
+    </p:spTree>
+    <p:extLst>
+      <p:ext uri="{BB962C8B-B14F-4D97-AF65-F5344CB8AC3E}">
+        <p14:creationId xmlns:p14="http://schemas.microsoft.com/office/powerpoint/2010/main" val="830339915"/>
+      </p:ext>
+    </p:extLst>
+  </p:cSld>
+  <p:clrMapOvr>
+    <a:masterClrMapping/>
+  </p:clrMapOvr>
+</p:notes>
+</file>
+
+<file path=ppt/notesSlides/notesSlide15.xml><?xml version="1.0" encoding="utf-8"?>
+<p:notes xmlns:a="http://schemas.openxmlformats.org/drawingml/2006/main" xmlns:r="http://schemas.openxmlformats.org/officeDocument/2006/relationships" xmlns:p="http://schemas.openxmlformats.org/presentationml/2006/main">
+  <p:cSld>
+    <p:spTree>
+      <p:nvGrpSpPr>
+        <p:cNvPr id="1" name=""/>
+        <p:cNvGrpSpPr/>
+        <p:nvPr/>
+      </p:nvGrpSpPr>
+      <p:grpSpPr>
+        <a:xfrm>
+          <a:off x="0" y="0"/>
+          <a:ext cx="0" cy="0"/>
+          <a:chOff x="0" y="0"/>
+          <a:chExt cx="0" cy="0"/>
+        </a:xfrm>
+      </p:grpSpPr>
+      <p:sp>
+        <p:nvSpPr>
+          <p:cNvPr id="2" name="Образ слайда 1"/>
+          <p:cNvSpPr>
+            <a:spLocks noGrp="1" noRot="1" noChangeAspect="1"/>
+          </p:cNvSpPr>
+          <p:nvPr>
+            <p:ph type="sldImg"/>
+          </p:nvPr>
+        </p:nvSpPr>
+        <p:spPr/>
+      </p:sp>
+      <p:sp>
+        <p:nvSpPr>
+          <p:cNvPr id="3" name="Заметки 2"/>
+          <p:cNvSpPr>
+            <a:spLocks noGrp="1"/>
+          </p:cNvSpPr>
+          <p:nvPr>
+            <p:ph type="body" idx="1"/>
+          </p:nvPr>
+        </p:nvSpPr>
+        <p:spPr/>
+        <p:txBody>
+          <a:bodyPr/>
+          <a:lstStyle/>
+          <a:p>
+            <a:endParaRPr lang="ru-RU" dirty="0"/>
+          </a:p>
+        </p:txBody>
+      </p:sp>
+      <p:sp>
+        <p:nvSpPr>
+          <p:cNvPr id="4" name="Номер слайда 3"/>
+          <p:cNvSpPr>
+            <a:spLocks noGrp="1"/>
+          </p:cNvSpPr>
+          <p:nvPr>
+            <p:ph type="sldNum" sz="quarter" idx="10"/>
+          </p:nvPr>
+        </p:nvSpPr>
+        <p:spPr/>
+        <p:txBody>
+          <a:bodyPr/>
+          <a:lstStyle/>
+          <a:p>
+            <a:fld id="{DD093330-6B9A-4C0D-8499-7E41F07687EA}" type="slidenum">
+              <a:rPr lang="ru-RU" smtClean="0"/>
+              <a:t>16</a:t>
             </a:fld>
             <a:endParaRPr lang="ru-RU"/>
           </a:p>
@@ -1644,7 +1729,7 @@
     </p:spTree>
     <p:extLst>
       <p:ext uri="{BB962C8B-B14F-4D97-AF65-F5344CB8AC3E}">
-        <p14:creationId xmlns:p14="http://schemas.microsoft.com/office/powerpoint/2010/main" val="3048732540"/>
+        <p14:creationId xmlns:p14="http://schemas.microsoft.com/office/powerpoint/2010/main" val="3697405121"/>
       </p:ext>
     </p:extLst>
   </p:cSld>
@@ -6370,7 +6455,7 @@
           <a:p>
             <a:fld id="{5E139BA1-5047-414E-8A3F-E19F7F2DED6E}" type="datetimeFigureOut">
               <a:rPr lang="ru-RU" smtClean="0"/>
-              <a:t>19.03.2026</a:t>
+              <a:t>26.03.2026</a:t>
             </a:fld>
             <a:endParaRPr lang="ru-RU"/>
           </a:p>
@@ -6960,7 +7045,7 @@
         </p:nvSpPr>
         <p:spPr>
           <a:xfrm>
-            <a:off x="1273569" y="5210854"/>
+            <a:off x="1215000" y="5388136"/>
             <a:ext cx="4434835" cy="584775"/>
           </a:xfrm>
           <a:prstGeom prst="rect">
@@ -7047,8 +7132,8 @@
         </p:nvSpPr>
         <p:spPr>
           <a:xfrm>
-            <a:off x="1198924" y="3288354"/>
-            <a:ext cx="10132991" cy="1415772"/>
+            <a:off x="1142942" y="3027097"/>
+            <a:ext cx="8486252" cy="2077492"/>
           </a:xfrm>
           <a:prstGeom prst="rect">
             <a:avLst/>
@@ -7068,7 +7153,24 @@
                 </a:solidFill>
                 <a:latin typeface="HSE Sans" panose="02000000000000000000" pitchFamily="2" charset="0"/>
               </a:rPr>
-              <a:t>Self-Evolving LLM Agents via Reflective Prompt and Tool-Schema Patching</a:t>
+              <a:t>Automatically Evolving Multi-Turn</a:t>
+            </a:r>
+            <a:br>
+              <a:rPr lang="en-US" sz="4300" dirty="0">
+                <a:solidFill>
+                  <a:srgbClr val="102D69"/>
+                </a:solidFill>
+                <a:latin typeface="HSE Sans" panose="02000000000000000000" pitchFamily="2" charset="0"/>
+              </a:rPr>
+            </a:br>
+            <a:r>
+              <a:rPr lang="en-US" sz="4300" dirty="0">
+                <a:solidFill>
+                  <a:srgbClr val="102D69"/>
+                </a:solidFill>
+                <a:latin typeface="HSE Sans" panose="02000000000000000000" pitchFamily="2" charset="0"/>
+              </a:rPr>
+              <a:t>Customer Service AI Agents via Prompt-Level Distillation</a:t>
             </a:r>
           </a:p>
         </p:txBody>
@@ -7363,6 +7465,582 @@
                 </a:solidFill>
                 <a:latin typeface="HSE Sans" panose="02000000000000000000" pitchFamily="2" charset="0"/>
               </a:rPr>
+              <a:t>9</a:t>
+            </a:r>
+            <a:endParaRPr lang="ru-RU" sz="2000" dirty="0">
+              <a:solidFill>
+                <a:srgbClr val="102D69"/>
+              </a:solidFill>
+              <a:latin typeface="HSE Sans" panose="02000000000000000000" pitchFamily="2" charset="0"/>
+            </a:endParaRPr>
+          </a:p>
+        </p:txBody>
+      </p:sp>
+      <p:sp>
+        <p:nvSpPr>
+          <p:cNvPr id="27" name="TextBox 26">
+            <a:extLst>
+              <a:ext uri="{FF2B5EF4-FFF2-40B4-BE49-F238E27FC236}">
+                <a16:creationId xmlns:a16="http://schemas.microsoft.com/office/drawing/2014/main" id="{E44D712D-40F7-624C-A601-9C19E270CD4C}"/>
+              </a:ext>
+            </a:extLst>
+          </p:cNvPr>
+          <p:cNvSpPr txBox="1"/>
+          <p:nvPr/>
+        </p:nvSpPr>
+        <p:spPr>
+          <a:xfrm>
+            <a:off x="489975" y="1396903"/>
+            <a:ext cx="10638335" cy="461665"/>
+          </a:xfrm>
+          <a:prstGeom prst="rect">
+            <a:avLst/>
+          </a:prstGeom>
+          <a:noFill/>
+        </p:spPr>
+        <p:txBody>
+          <a:bodyPr wrap="square" rtlCol="0" anchor="t" anchorCtr="0">
+            <a:spAutoFit/>
+          </a:bodyPr>
+          <a:lstStyle/>
+          <a:p>
+            <a:r>
+              <a:rPr lang="en-US" sz="2400" dirty="0">
+                <a:solidFill>
+                  <a:srgbClr val="102D69"/>
+                </a:solidFill>
+                <a:latin typeface="HSE Sans" panose="02000000000000000000" pitchFamily="2" charset="0"/>
+              </a:rPr>
+              <a:t>We built an experimental UI</a:t>
+            </a:r>
+            <a:endParaRPr lang="ru-RU" sz="2400" dirty="0">
+              <a:solidFill>
+                <a:srgbClr val="102D69"/>
+              </a:solidFill>
+              <a:latin typeface="HSE Sans" panose="02000000000000000000" pitchFamily="2" charset="0"/>
+            </a:endParaRPr>
+          </a:p>
+        </p:txBody>
+      </p:sp>
+      <p:cxnSp>
+        <p:nvCxnSpPr>
+          <p:cNvPr id="28" name="Straight Connector 13">
+            <a:extLst>
+              <a:ext uri="{FF2B5EF4-FFF2-40B4-BE49-F238E27FC236}">
+                <a16:creationId xmlns:a16="http://schemas.microsoft.com/office/drawing/2014/main" id="{62E2D9CC-0CF4-324B-BFF1-AC830802DEEB}"/>
+              </a:ext>
+            </a:extLst>
+          </p:cNvPr>
+          <p:cNvCxnSpPr>
+            <a:cxnSpLocks/>
+          </p:cNvCxnSpPr>
+          <p:nvPr/>
+        </p:nvCxnSpPr>
+        <p:spPr>
+          <a:xfrm>
+            <a:off x="11643868" y="464363"/>
+            <a:ext cx="0" cy="586260"/>
+          </a:xfrm>
+          <a:prstGeom prst="line">
+            <a:avLst/>
+          </a:prstGeom>
+          <a:ln w="12700">
+            <a:solidFill>
+              <a:srgbClr val="102D69"/>
+            </a:solidFill>
+          </a:ln>
+        </p:spPr>
+        <p:style>
+          <a:lnRef idx="1">
+            <a:schemeClr val="accent1"/>
+          </a:lnRef>
+          <a:fillRef idx="0">
+            <a:schemeClr val="accent1"/>
+          </a:fillRef>
+          <a:effectRef idx="0">
+            <a:schemeClr val="accent1"/>
+          </a:effectRef>
+          <a:fontRef idx="minor">
+            <a:schemeClr val="tx1"/>
+          </a:fontRef>
+        </p:style>
+      </p:cxnSp>
+      <p:sp>
+        <p:nvSpPr>
+          <p:cNvPr id="41" name="TextBox 40">
+            <a:extLst>
+              <a:ext uri="{FF2B5EF4-FFF2-40B4-BE49-F238E27FC236}">
+                <a16:creationId xmlns:a16="http://schemas.microsoft.com/office/drawing/2014/main" id="{C3B50D95-E8C8-FD48-AEBE-39A9FC1A091E}"/>
+              </a:ext>
+            </a:extLst>
+          </p:cNvPr>
+          <p:cNvSpPr txBox="1"/>
+          <p:nvPr/>
+        </p:nvSpPr>
+        <p:spPr>
+          <a:xfrm>
+            <a:off x="3365627" y="497315"/>
+            <a:ext cx="2346745" cy="553998"/>
+          </a:xfrm>
+          <a:prstGeom prst="rect">
+            <a:avLst/>
+          </a:prstGeom>
+          <a:noFill/>
+        </p:spPr>
+        <p:txBody>
+          <a:bodyPr wrap="square" rtlCol="0">
+            <a:spAutoFit/>
+          </a:bodyPr>
+          <a:lstStyle/>
+          <a:p>
+            <a:r>
+              <a:rPr lang="en-US" sz="1000" dirty="0">
+                <a:latin typeface="HSE Sans" panose="02000000000000000000" pitchFamily="2" charset="0"/>
+              </a:rPr>
+              <a:t>Automatically Evolving Multi-Turn</a:t>
+            </a:r>
+            <a:br>
+              <a:rPr lang="en-US" sz="1000" dirty="0">
+                <a:latin typeface="HSE Sans" panose="02000000000000000000" pitchFamily="2" charset="0"/>
+              </a:rPr>
+            </a:br>
+            <a:r>
+              <a:rPr lang="en-US" sz="1000" dirty="0">
+                <a:latin typeface="HSE Sans" panose="02000000000000000000" pitchFamily="2" charset="0"/>
+              </a:rPr>
+              <a:t>Customer Service AI Agents via Prompt-Level Distillation</a:t>
+            </a:r>
+          </a:p>
+        </p:txBody>
+      </p:sp>
+      <p:sp>
+        <p:nvSpPr>
+          <p:cNvPr id="42" name="TextBox 41">
+            <a:extLst>
+              <a:ext uri="{FF2B5EF4-FFF2-40B4-BE49-F238E27FC236}">
+                <a16:creationId xmlns:a16="http://schemas.microsoft.com/office/drawing/2014/main" id="{AF2EE3B1-6486-FC4E-869B-3E2E08E09E21}"/>
+              </a:ext>
+            </a:extLst>
+          </p:cNvPr>
+          <p:cNvSpPr txBox="1"/>
+          <p:nvPr/>
+        </p:nvSpPr>
+        <p:spPr>
+          <a:xfrm>
+            <a:off x="6158118" y="497315"/>
+            <a:ext cx="2346745" cy="246221"/>
+          </a:xfrm>
+          <a:prstGeom prst="rect">
+            <a:avLst/>
+          </a:prstGeom>
+          <a:noFill/>
+        </p:spPr>
+        <p:txBody>
+          <a:bodyPr wrap="square" rtlCol="0">
+            <a:spAutoFit/>
+          </a:bodyPr>
+          <a:lstStyle/>
+          <a:p>
+            <a:r>
+              <a:rPr lang="en-US" sz="1000" dirty="0">
+                <a:latin typeface="HSE Sans" panose="02000000000000000000" pitchFamily="2" charset="0"/>
+              </a:rPr>
+              <a:t>Methodology</a:t>
+            </a:r>
+            <a:endParaRPr lang="ru-RU" sz="1000" dirty="0">
+              <a:latin typeface="HSE Sans" panose="02000000000000000000" pitchFamily="2" charset="0"/>
+            </a:endParaRPr>
+          </a:p>
+        </p:txBody>
+      </p:sp>
+      <p:pic>
+        <p:nvPicPr>
+          <p:cNvPr id="3" name="Picture 2">
+            <a:extLst>
+              <a:ext uri="{FF2B5EF4-FFF2-40B4-BE49-F238E27FC236}">
+                <a16:creationId xmlns:a16="http://schemas.microsoft.com/office/drawing/2014/main" id="{44A4F35B-7BD9-4CC4-A21B-92ABE8B786DD}"/>
+              </a:ext>
+            </a:extLst>
+          </p:cNvPr>
+          <p:cNvPicPr>
+            <a:picLocks noChangeAspect="1"/>
+          </p:cNvPicPr>
+          <p:nvPr/>
+        </p:nvPicPr>
+        <p:blipFill>
+          <a:blip r:embed="rId3"/>
+          <a:stretch>
+            <a:fillRect/>
+          </a:stretch>
+        </p:blipFill>
+        <p:spPr>
+          <a:xfrm>
+            <a:off x="489975" y="2938193"/>
+            <a:ext cx="5078078" cy="3526443"/>
+          </a:xfrm>
+          <a:prstGeom prst="rect">
+            <a:avLst/>
+          </a:prstGeom>
+        </p:spPr>
+      </p:pic>
+      <p:pic>
+        <p:nvPicPr>
+          <p:cNvPr id="9" name="Picture 8">
+            <a:extLst>
+              <a:ext uri="{FF2B5EF4-FFF2-40B4-BE49-F238E27FC236}">
+                <a16:creationId xmlns:a16="http://schemas.microsoft.com/office/drawing/2014/main" id="{DF240C8A-D8BE-4B66-82A5-92FDF494307A}"/>
+              </a:ext>
+            </a:extLst>
+          </p:cNvPr>
+          <p:cNvPicPr>
+            <a:picLocks noChangeAspect="1"/>
+          </p:cNvPicPr>
+          <p:nvPr/>
+        </p:nvPicPr>
+        <p:blipFill>
+          <a:blip r:embed="rId4"/>
+          <a:stretch>
+            <a:fillRect/>
+          </a:stretch>
+        </p:blipFill>
+        <p:spPr>
+          <a:xfrm>
+            <a:off x="5880321" y="2204158"/>
+            <a:ext cx="5908899" cy="1553633"/>
+          </a:xfrm>
+          <a:prstGeom prst="rect">
+            <a:avLst/>
+          </a:prstGeom>
+        </p:spPr>
+      </p:pic>
+      <p:pic>
+        <p:nvPicPr>
+          <p:cNvPr id="11" name="Picture 10">
+            <a:extLst>
+              <a:ext uri="{FF2B5EF4-FFF2-40B4-BE49-F238E27FC236}">
+                <a16:creationId xmlns:a16="http://schemas.microsoft.com/office/drawing/2014/main" id="{8F5C459E-BF21-4B20-A26A-455684BB887C}"/>
+              </a:ext>
+            </a:extLst>
+          </p:cNvPr>
+          <p:cNvPicPr>
+            <a:picLocks noChangeAspect="1"/>
+          </p:cNvPicPr>
+          <p:nvPr/>
+        </p:nvPicPr>
+        <p:blipFill rotWithShape="1">
+          <a:blip r:embed="rId5"/>
+          <a:srcRect l="4069" t="11878" r="6194" b="12781"/>
+          <a:stretch/>
+        </p:blipFill>
+        <p:spPr>
+          <a:xfrm>
+            <a:off x="5880322" y="4476254"/>
+            <a:ext cx="5908899" cy="1917384"/>
+          </a:xfrm>
+          <a:prstGeom prst="rect">
+            <a:avLst/>
+          </a:prstGeom>
+        </p:spPr>
+      </p:pic>
+      <p:sp>
+        <p:nvSpPr>
+          <p:cNvPr id="20" name="TextBox 19">
+            <a:extLst>
+              <a:ext uri="{FF2B5EF4-FFF2-40B4-BE49-F238E27FC236}">
+                <a16:creationId xmlns:a16="http://schemas.microsoft.com/office/drawing/2014/main" id="{95767753-86C5-4DD4-AC29-91931B1115CD}"/>
+              </a:ext>
+            </a:extLst>
+          </p:cNvPr>
+          <p:cNvSpPr txBox="1"/>
+          <p:nvPr/>
+        </p:nvSpPr>
+        <p:spPr>
+          <a:xfrm>
+            <a:off x="489975" y="2511935"/>
+            <a:ext cx="4329404" cy="369332"/>
+          </a:xfrm>
+          <a:prstGeom prst="rect">
+            <a:avLst/>
+          </a:prstGeom>
+          <a:noFill/>
+        </p:spPr>
+        <p:txBody>
+          <a:bodyPr wrap="square" rtlCol="0">
+            <a:spAutoFit/>
+          </a:bodyPr>
+          <a:lstStyle/>
+          <a:p>
+            <a:r>
+              <a:rPr lang="en-US" dirty="0"/>
+              <a:t>20-task run summary</a:t>
+            </a:r>
+          </a:p>
+        </p:txBody>
+      </p:sp>
+      <p:sp>
+        <p:nvSpPr>
+          <p:cNvPr id="21" name="TextBox 20">
+            <a:extLst>
+              <a:ext uri="{FF2B5EF4-FFF2-40B4-BE49-F238E27FC236}">
+                <a16:creationId xmlns:a16="http://schemas.microsoft.com/office/drawing/2014/main" id="{A11C6B3E-DEB3-4D85-8ABD-4B5F9F5EABCD}"/>
+              </a:ext>
+            </a:extLst>
+          </p:cNvPr>
+          <p:cNvSpPr txBox="1"/>
+          <p:nvPr/>
+        </p:nvSpPr>
+        <p:spPr>
+          <a:xfrm>
+            <a:off x="5809142" y="1816799"/>
+            <a:ext cx="4329404" cy="369332"/>
+          </a:xfrm>
+          <a:prstGeom prst="rect">
+            <a:avLst/>
+          </a:prstGeom>
+          <a:noFill/>
+        </p:spPr>
+        <p:txBody>
+          <a:bodyPr wrap="square" rtlCol="0">
+            <a:spAutoFit/>
+          </a:bodyPr>
+          <a:lstStyle/>
+          <a:p>
+            <a:r>
+              <a:rPr lang="en-US" dirty="0"/>
+              <a:t>LLM teacher generating a fix</a:t>
+            </a:r>
+          </a:p>
+        </p:txBody>
+      </p:sp>
+      <p:sp>
+        <p:nvSpPr>
+          <p:cNvPr id="30" name="TextBox 29">
+            <a:extLst>
+              <a:ext uri="{FF2B5EF4-FFF2-40B4-BE49-F238E27FC236}">
+                <a16:creationId xmlns:a16="http://schemas.microsoft.com/office/drawing/2014/main" id="{E694E254-AF74-431D-B062-A8451BC366BD}"/>
+              </a:ext>
+            </a:extLst>
+          </p:cNvPr>
+          <p:cNvSpPr txBox="1"/>
+          <p:nvPr/>
+        </p:nvSpPr>
+        <p:spPr>
+          <a:xfrm>
+            <a:off x="5809142" y="4103381"/>
+            <a:ext cx="4329404" cy="369332"/>
+          </a:xfrm>
+          <a:prstGeom prst="rect">
+            <a:avLst/>
+          </a:prstGeom>
+          <a:noFill/>
+        </p:spPr>
+        <p:txBody>
+          <a:bodyPr wrap="square" rtlCol="0">
+            <a:spAutoFit/>
+          </a:bodyPr>
+          <a:lstStyle/>
+          <a:p>
+            <a:r>
+              <a:rPr lang="en-US" dirty="0"/>
+              <a:t>20-task over 3 sweeps result heatmap</a:t>
+            </a:r>
+          </a:p>
+        </p:txBody>
+      </p:sp>
+    </p:spTree>
+    <p:extLst>
+      <p:ext uri="{BB962C8B-B14F-4D97-AF65-F5344CB8AC3E}">
+        <p14:creationId xmlns:p14="http://schemas.microsoft.com/office/powerpoint/2010/main" val="3523603925"/>
+      </p:ext>
+    </p:extLst>
+  </p:cSld>
+  <p:clrMapOvr>
+    <a:masterClrMapping/>
+  </p:clrMapOvr>
+</p:sld>
+</file>
+
+<file path=ppt/slides/slide11.xml><?xml version="1.0" encoding="utf-8"?>
+<p:sld xmlns:a="http://schemas.openxmlformats.org/drawingml/2006/main" xmlns:r="http://schemas.openxmlformats.org/officeDocument/2006/relationships" xmlns:p="http://schemas.openxmlformats.org/presentationml/2006/main">
+  <p:cSld>
+    <p:spTree>
+      <p:nvGrpSpPr>
+        <p:cNvPr id="1" name=""/>
+        <p:cNvGrpSpPr/>
+        <p:nvPr/>
+      </p:nvGrpSpPr>
+      <p:grpSpPr>
+        <a:xfrm>
+          <a:off x="0" y="0"/>
+          <a:ext cx="0" cy="0"/>
+          <a:chOff x="0" y="0"/>
+          <a:chExt cx="0" cy="0"/>
+        </a:xfrm>
+      </p:grpSpPr>
+      <p:cxnSp>
+        <p:nvCxnSpPr>
+          <p:cNvPr id="23" name="Straight Connector 19">
+            <a:extLst>
+              <a:ext uri="{FF2B5EF4-FFF2-40B4-BE49-F238E27FC236}">
+                <a16:creationId xmlns:a16="http://schemas.microsoft.com/office/drawing/2014/main" id="{F208E74D-9D70-3B41-9778-E6E8B05CDF2D}"/>
+              </a:ext>
+            </a:extLst>
+          </p:cNvPr>
+          <p:cNvCxnSpPr>
+            <a:cxnSpLocks/>
+          </p:cNvCxnSpPr>
+          <p:nvPr/>
+        </p:nvCxnSpPr>
+        <p:spPr>
+          <a:xfrm>
+            <a:off x="3298686" y="464363"/>
+            <a:ext cx="0" cy="586260"/>
+          </a:xfrm>
+          <a:prstGeom prst="line">
+            <a:avLst/>
+          </a:prstGeom>
+          <a:ln w="12700">
+            <a:solidFill>
+              <a:srgbClr val="102D69"/>
+            </a:solidFill>
+          </a:ln>
+        </p:spPr>
+        <p:style>
+          <a:lnRef idx="1">
+            <a:schemeClr val="accent1"/>
+          </a:lnRef>
+          <a:fillRef idx="0">
+            <a:schemeClr val="accent1"/>
+          </a:fillRef>
+          <a:effectRef idx="0">
+            <a:schemeClr val="accent1"/>
+          </a:effectRef>
+          <a:fontRef idx="minor">
+            <a:schemeClr val="tx1"/>
+          </a:fontRef>
+        </p:style>
+      </p:cxnSp>
+      <p:cxnSp>
+        <p:nvCxnSpPr>
+          <p:cNvPr id="24" name="Straight Connector 21">
+            <a:extLst>
+              <a:ext uri="{FF2B5EF4-FFF2-40B4-BE49-F238E27FC236}">
+                <a16:creationId xmlns:a16="http://schemas.microsoft.com/office/drawing/2014/main" id="{89B3484F-8C76-694C-8CD1-F1F8262BD87E}"/>
+              </a:ext>
+            </a:extLst>
+          </p:cNvPr>
+          <p:cNvCxnSpPr>
+            <a:cxnSpLocks/>
+          </p:cNvCxnSpPr>
+          <p:nvPr/>
+        </p:nvCxnSpPr>
+        <p:spPr>
+          <a:xfrm>
+            <a:off x="6099416" y="464363"/>
+            <a:ext cx="0" cy="586260"/>
+          </a:xfrm>
+          <a:prstGeom prst="line">
+            <a:avLst/>
+          </a:prstGeom>
+          <a:ln w="12700">
+            <a:solidFill>
+              <a:srgbClr val="102D69"/>
+            </a:solidFill>
+          </a:ln>
+        </p:spPr>
+        <p:style>
+          <a:lnRef idx="1">
+            <a:schemeClr val="accent1"/>
+          </a:lnRef>
+          <a:fillRef idx="0">
+            <a:schemeClr val="accent1"/>
+          </a:fillRef>
+          <a:effectRef idx="0">
+            <a:schemeClr val="accent1"/>
+          </a:effectRef>
+          <a:fontRef idx="minor">
+            <a:schemeClr val="tx1"/>
+          </a:fontRef>
+        </p:style>
+      </p:cxnSp>
+      <p:cxnSp>
+        <p:nvCxnSpPr>
+          <p:cNvPr id="25" name="Straight Connector 25">
+            <a:extLst>
+              <a:ext uri="{FF2B5EF4-FFF2-40B4-BE49-F238E27FC236}">
+                <a16:creationId xmlns:a16="http://schemas.microsoft.com/office/drawing/2014/main" id="{B571D10A-0DDC-9847-BD1B-712A3C9F3055}"/>
+              </a:ext>
+            </a:extLst>
+          </p:cNvPr>
+          <p:cNvCxnSpPr>
+            <a:cxnSpLocks/>
+          </p:cNvCxnSpPr>
+          <p:nvPr/>
+        </p:nvCxnSpPr>
+        <p:spPr>
+          <a:xfrm>
+            <a:off x="10277081" y="464363"/>
+            <a:ext cx="0" cy="586260"/>
+          </a:xfrm>
+          <a:prstGeom prst="line">
+            <a:avLst/>
+          </a:prstGeom>
+          <a:ln w="12700">
+            <a:solidFill>
+              <a:srgbClr val="102D69"/>
+            </a:solidFill>
+          </a:ln>
+        </p:spPr>
+        <p:style>
+          <a:lnRef idx="1">
+            <a:schemeClr val="accent1"/>
+          </a:lnRef>
+          <a:fillRef idx="0">
+            <a:schemeClr val="accent1"/>
+          </a:fillRef>
+          <a:effectRef idx="0">
+            <a:schemeClr val="accent1"/>
+          </a:effectRef>
+          <a:fontRef idx="minor">
+            <a:schemeClr val="tx1"/>
+          </a:fontRef>
+        </p:style>
+      </p:cxnSp>
+      <p:sp>
+        <p:nvSpPr>
+          <p:cNvPr id="26" name="TextBox 25">
+            <a:extLst>
+              <a:ext uri="{FF2B5EF4-FFF2-40B4-BE49-F238E27FC236}">
+                <a16:creationId xmlns:a16="http://schemas.microsoft.com/office/drawing/2014/main" id="{8E64125C-F6DE-1F4A-A554-9F1C35EAFB8C}"/>
+              </a:ext>
+            </a:extLst>
+          </p:cNvPr>
+          <p:cNvSpPr txBox="1"/>
+          <p:nvPr/>
+        </p:nvSpPr>
+        <p:spPr>
+          <a:xfrm>
+            <a:off x="10337843" y="497315"/>
+            <a:ext cx="671977" cy="400110"/>
+          </a:xfrm>
+          <a:prstGeom prst="rect">
+            <a:avLst/>
+          </a:prstGeom>
+          <a:noFill/>
+        </p:spPr>
+        <p:txBody>
+          <a:bodyPr wrap="square" rtlCol="0">
+            <a:spAutoFit/>
+          </a:bodyPr>
+          <a:lstStyle/>
+          <a:p>
+            <a:r>
+              <a:rPr lang="en-US" sz="2000" dirty="0">
+                <a:solidFill>
+                  <a:srgbClr val="102D69"/>
+                </a:solidFill>
+                <a:latin typeface="HSE Sans" panose="02000000000000000000" pitchFamily="2" charset="0"/>
+              </a:rPr>
               <a:t>10</a:t>
             </a:r>
             <a:endParaRPr lang="ru-RU" sz="2000" dirty="0">
@@ -7478,7 +8156,7 @@
         <p:spPr>
           <a:xfrm>
             <a:off x="3365627" y="497315"/>
-            <a:ext cx="2346745" cy="400110"/>
+            <a:ext cx="2346745" cy="553998"/>
           </a:xfrm>
           <a:prstGeom prst="rect">
             <a:avLst/>
@@ -7495,7 +8173,18 @@
               <a:rPr lang="en-US" sz="1000" dirty="0">
                 <a:latin typeface="HSE Sans" panose="02000000000000000000" pitchFamily="2" charset="0"/>
               </a:rPr>
-              <a:t>Self-Evolving LLM Agents via Reflective Prompt and Tool-Schema Patching</a:t>
+              <a:t>Automatically Evolving Multi-Turn</a:t>
+            </a:r>
+            <a:br>
+              <a:rPr lang="en-US" sz="1000" dirty="0">
+                <a:latin typeface="HSE Sans" panose="02000000000000000000" pitchFamily="2" charset="0"/>
+              </a:rPr>
+            </a:br>
+            <a:r>
+              <a:rPr lang="en-US" sz="1000" dirty="0">
+                <a:latin typeface="HSE Sans" panose="02000000000000000000" pitchFamily="2" charset="0"/>
+              </a:rPr>
+              <a:t>Customer Service AI Agents via Prompt-Level Distillation</a:t>
             </a:r>
           </a:p>
         </p:txBody>
@@ -7974,7 +8663,7 @@
 </p:sld>
 </file>
 
-<file path=ppt/slides/slide11.xml><?xml version="1.0" encoding="utf-8"?>
+<file path=ppt/slides/slide12.xml><?xml version="1.0" encoding="utf-8"?>
 <p:sld xmlns:a="http://schemas.openxmlformats.org/drawingml/2006/main" xmlns:r="http://schemas.openxmlformats.org/officeDocument/2006/relationships" xmlns:p="http://schemas.openxmlformats.org/presentationml/2006/main">
   <p:cSld>
     <p:spTree>
@@ -8270,7 +8959,7 @@
         <p:spPr>
           <a:xfrm>
             <a:off x="3365627" y="497315"/>
-            <a:ext cx="2346745" cy="400110"/>
+            <a:ext cx="2346745" cy="553998"/>
           </a:xfrm>
           <a:prstGeom prst="rect">
             <a:avLst/>
@@ -8287,7 +8976,18 @@
               <a:rPr lang="en-US" sz="1000" dirty="0">
                 <a:latin typeface="HSE Sans" panose="02000000000000000000" pitchFamily="2" charset="0"/>
               </a:rPr>
-              <a:t>Self-Evolving LLM Agents via Reflective Prompt and Tool-Schema Patching</a:t>
+              <a:t>Automatically Evolving Multi-Turn</a:t>
+            </a:r>
+            <a:br>
+              <a:rPr lang="en-US" sz="1000" dirty="0">
+                <a:latin typeface="HSE Sans" panose="02000000000000000000" pitchFamily="2" charset="0"/>
+              </a:rPr>
+            </a:br>
+            <a:r>
+              <a:rPr lang="en-US" sz="1000" dirty="0">
+                <a:latin typeface="HSE Sans" panose="02000000000000000000" pitchFamily="2" charset="0"/>
+              </a:rPr>
+              <a:t>Customer Service AI Agents via Prompt-Level Distillation</a:t>
             </a:r>
           </a:p>
         </p:txBody>
@@ -12173,1176 +12873,6 @@
 </p:sld>
 </file>
 
-<file path=ppt/slides/slide12.xml><?xml version="1.0" encoding="utf-8"?>
-<p:sld xmlns:a="http://schemas.openxmlformats.org/drawingml/2006/main" xmlns:r="http://schemas.openxmlformats.org/officeDocument/2006/relationships" xmlns:p="http://schemas.openxmlformats.org/presentationml/2006/main">
-  <p:cSld>
-    <p:spTree>
-      <p:nvGrpSpPr>
-        <p:cNvPr id="1" name=""/>
-        <p:cNvGrpSpPr/>
-        <p:nvPr/>
-      </p:nvGrpSpPr>
-      <p:grpSpPr>
-        <a:xfrm>
-          <a:off x="0" y="0"/>
-          <a:ext cx="0" cy="0"/>
-          <a:chOff x="0" y="0"/>
-          <a:chExt cx="0" cy="0"/>
-        </a:xfrm>
-      </p:grpSpPr>
-      <p:cxnSp>
-        <p:nvCxnSpPr>
-          <p:cNvPr id="23" name="Straight Connector 19">
-            <a:extLst>
-              <a:ext uri="{FF2B5EF4-FFF2-40B4-BE49-F238E27FC236}">
-                <a16:creationId xmlns:a16="http://schemas.microsoft.com/office/drawing/2014/main" id="{F208E74D-9D70-3B41-9778-E6E8B05CDF2D}"/>
-              </a:ext>
-            </a:extLst>
-          </p:cNvPr>
-          <p:cNvCxnSpPr>
-            <a:cxnSpLocks/>
-          </p:cNvCxnSpPr>
-          <p:nvPr/>
-        </p:nvCxnSpPr>
-        <p:spPr>
-          <a:xfrm>
-            <a:off x="3298686" y="464363"/>
-            <a:ext cx="0" cy="586260"/>
-          </a:xfrm>
-          <a:prstGeom prst="line">
-            <a:avLst/>
-          </a:prstGeom>
-          <a:ln w="12700">
-            <a:solidFill>
-              <a:srgbClr val="102D69"/>
-            </a:solidFill>
-          </a:ln>
-        </p:spPr>
-        <p:style>
-          <a:lnRef idx="1">
-            <a:schemeClr val="accent1"/>
-          </a:lnRef>
-          <a:fillRef idx="0">
-            <a:schemeClr val="accent1"/>
-          </a:fillRef>
-          <a:effectRef idx="0">
-            <a:schemeClr val="accent1"/>
-          </a:effectRef>
-          <a:fontRef idx="minor">
-            <a:schemeClr val="tx1"/>
-          </a:fontRef>
-        </p:style>
-      </p:cxnSp>
-      <p:cxnSp>
-        <p:nvCxnSpPr>
-          <p:cNvPr id="24" name="Straight Connector 21">
-            <a:extLst>
-              <a:ext uri="{FF2B5EF4-FFF2-40B4-BE49-F238E27FC236}">
-                <a16:creationId xmlns:a16="http://schemas.microsoft.com/office/drawing/2014/main" id="{89B3484F-8C76-694C-8CD1-F1F8262BD87E}"/>
-              </a:ext>
-            </a:extLst>
-          </p:cNvPr>
-          <p:cNvCxnSpPr>
-            <a:cxnSpLocks/>
-          </p:cNvCxnSpPr>
-          <p:nvPr/>
-        </p:nvCxnSpPr>
-        <p:spPr>
-          <a:xfrm>
-            <a:off x="6099416" y="464363"/>
-            <a:ext cx="0" cy="586260"/>
-          </a:xfrm>
-          <a:prstGeom prst="line">
-            <a:avLst/>
-          </a:prstGeom>
-          <a:ln w="12700">
-            <a:solidFill>
-              <a:srgbClr val="102D69"/>
-            </a:solidFill>
-          </a:ln>
-        </p:spPr>
-        <p:style>
-          <a:lnRef idx="1">
-            <a:schemeClr val="accent1"/>
-          </a:lnRef>
-          <a:fillRef idx="0">
-            <a:schemeClr val="accent1"/>
-          </a:fillRef>
-          <a:effectRef idx="0">
-            <a:schemeClr val="accent1"/>
-          </a:effectRef>
-          <a:fontRef idx="minor">
-            <a:schemeClr val="tx1"/>
-          </a:fontRef>
-        </p:style>
-      </p:cxnSp>
-      <p:cxnSp>
-        <p:nvCxnSpPr>
-          <p:cNvPr id="25" name="Straight Connector 25">
-            <a:extLst>
-              <a:ext uri="{FF2B5EF4-FFF2-40B4-BE49-F238E27FC236}">
-                <a16:creationId xmlns:a16="http://schemas.microsoft.com/office/drawing/2014/main" id="{B571D10A-0DDC-9847-BD1B-712A3C9F3055}"/>
-              </a:ext>
-            </a:extLst>
-          </p:cNvPr>
-          <p:cNvCxnSpPr>
-            <a:cxnSpLocks/>
-          </p:cNvCxnSpPr>
-          <p:nvPr/>
-        </p:nvCxnSpPr>
-        <p:spPr>
-          <a:xfrm>
-            <a:off x="10277081" y="464363"/>
-            <a:ext cx="0" cy="586260"/>
-          </a:xfrm>
-          <a:prstGeom prst="line">
-            <a:avLst/>
-          </a:prstGeom>
-          <a:ln w="12700">
-            <a:solidFill>
-              <a:srgbClr val="102D69"/>
-            </a:solidFill>
-          </a:ln>
-        </p:spPr>
-        <p:style>
-          <a:lnRef idx="1">
-            <a:schemeClr val="accent1"/>
-          </a:lnRef>
-          <a:fillRef idx="0">
-            <a:schemeClr val="accent1"/>
-          </a:fillRef>
-          <a:effectRef idx="0">
-            <a:schemeClr val="accent1"/>
-          </a:effectRef>
-          <a:fontRef idx="minor">
-            <a:schemeClr val="tx1"/>
-          </a:fontRef>
-        </p:style>
-      </p:cxnSp>
-      <p:sp>
-        <p:nvSpPr>
-          <p:cNvPr id="26" name="TextBox 25">
-            <a:extLst>
-              <a:ext uri="{FF2B5EF4-FFF2-40B4-BE49-F238E27FC236}">
-                <a16:creationId xmlns:a16="http://schemas.microsoft.com/office/drawing/2014/main" id="{8E64125C-F6DE-1F4A-A554-9F1C35EAFB8C}"/>
-              </a:ext>
-            </a:extLst>
-          </p:cNvPr>
-          <p:cNvSpPr txBox="1"/>
-          <p:nvPr/>
-        </p:nvSpPr>
-        <p:spPr>
-          <a:xfrm>
-            <a:off x="10337843" y="497315"/>
-            <a:ext cx="671977" cy="400110"/>
-          </a:xfrm>
-          <a:prstGeom prst="rect">
-            <a:avLst/>
-          </a:prstGeom>
-          <a:noFill/>
-        </p:spPr>
-        <p:txBody>
-          <a:bodyPr wrap="square" rtlCol="0">
-            <a:spAutoFit/>
-          </a:bodyPr>
-          <a:lstStyle/>
-          <a:p>
-            <a:r>
-              <a:rPr lang="en-US" sz="2000" dirty="0">
-                <a:solidFill>
-                  <a:srgbClr val="102D69"/>
-                </a:solidFill>
-                <a:latin typeface="HSE Sans" panose="02000000000000000000" pitchFamily="2" charset="0"/>
-              </a:rPr>
-              <a:t>12</a:t>
-            </a:r>
-            <a:endParaRPr lang="ru-RU" sz="2000" dirty="0">
-              <a:solidFill>
-                <a:srgbClr val="102D69"/>
-              </a:solidFill>
-              <a:latin typeface="HSE Sans" panose="02000000000000000000" pitchFamily="2" charset="0"/>
-            </a:endParaRPr>
-          </a:p>
-        </p:txBody>
-      </p:sp>
-      <p:sp>
-        <p:nvSpPr>
-          <p:cNvPr id="27" name="TextBox 26">
-            <a:extLst>
-              <a:ext uri="{FF2B5EF4-FFF2-40B4-BE49-F238E27FC236}">
-                <a16:creationId xmlns:a16="http://schemas.microsoft.com/office/drawing/2014/main" id="{E44D712D-40F7-624C-A601-9C19E270CD4C}"/>
-              </a:ext>
-            </a:extLst>
-          </p:cNvPr>
-          <p:cNvSpPr txBox="1"/>
-          <p:nvPr/>
-        </p:nvSpPr>
-        <p:spPr>
-          <a:xfrm>
-            <a:off x="489975" y="1396903"/>
-            <a:ext cx="10638335" cy="461665"/>
-          </a:xfrm>
-          <a:prstGeom prst="rect">
-            <a:avLst/>
-          </a:prstGeom>
-          <a:noFill/>
-        </p:spPr>
-        <p:txBody>
-          <a:bodyPr wrap="square" rtlCol="0" anchor="t" anchorCtr="0">
-            <a:spAutoFit/>
-          </a:bodyPr>
-          <a:lstStyle/>
-          <a:p>
-            <a:r>
-              <a:rPr lang="en-US" sz="2400" dirty="0">
-                <a:solidFill>
-                  <a:srgbClr val="102D69"/>
-                </a:solidFill>
-                <a:latin typeface="HSE Sans" panose="02000000000000000000" pitchFamily="2" charset="0"/>
-              </a:rPr>
-              <a:t>F2: More tasks -&gt; lower the fix rate, but with caveats</a:t>
-            </a:r>
-            <a:endParaRPr lang="ru-RU" sz="2400" dirty="0">
-              <a:solidFill>
-                <a:srgbClr val="102D69"/>
-              </a:solidFill>
-              <a:latin typeface="HSE Sans" panose="02000000000000000000" pitchFamily="2" charset="0"/>
-            </a:endParaRPr>
-          </a:p>
-        </p:txBody>
-      </p:sp>
-      <p:cxnSp>
-        <p:nvCxnSpPr>
-          <p:cNvPr id="28" name="Straight Connector 13">
-            <a:extLst>
-              <a:ext uri="{FF2B5EF4-FFF2-40B4-BE49-F238E27FC236}">
-                <a16:creationId xmlns:a16="http://schemas.microsoft.com/office/drawing/2014/main" id="{62E2D9CC-0CF4-324B-BFF1-AC830802DEEB}"/>
-              </a:ext>
-            </a:extLst>
-          </p:cNvPr>
-          <p:cNvCxnSpPr>
-            <a:cxnSpLocks/>
-          </p:cNvCxnSpPr>
-          <p:nvPr/>
-        </p:nvCxnSpPr>
-        <p:spPr>
-          <a:xfrm>
-            <a:off x="11643868" y="464363"/>
-            <a:ext cx="0" cy="586260"/>
-          </a:xfrm>
-          <a:prstGeom prst="line">
-            <a:avLst/>
-          </a:prstGeom>
-          <a:ln w="12700">
-            <a:solidFill>
-              <a:srgbClr val="102D69"/>
-            </a:solidFill>
-          </a:ln>
-        </p:spPr>
-        <p:style>
-          <a:lnRef idx="1">
-            <a:schemeClr val="accent1"/>
-          </a:lnRef>
-          <a:fillRef idx="0">
-            <a:schemeClr val="accent1"/>
-          </a:fillRef>
-          <a:effectRef idx="0">
-            <a:schemeClr val="accent1"/>
-          </a:effectRef>
-          <a:fontRef idx="minor">
-            <a:schemeClr val="tx1"/>
-          </a:fontRef>
-        </p:style>
-      </p:cxnSp>
-      <p:sp>
-        <p:nvSpPr>
-          <p:cNvPr id="41" name="TextBox 40">
-            <a:extLst>
-              <a:ext uri="{FF2B5EF4-FFF2-40B4-BE49-F238E27FC236}">
-                <a16:creationId xmlns:a16="http://schemas.microsoft.com/office/drawing/2014/main" id="{C3B50D95-E8C8-FD48-AEBE-39A9FC1A091E}"/>
-              </a:ext>
-            </a:extLst>
-          </p:cNvPr>
-          <p:cNvSpPr txBox="1"/>
-          <p:nvPr/>
-        </p:nvSpPr>
-        <p:spPr>
-          <a:xfrm>
-            <a:off x="3365627" y="497315"/>
-            <a:ext cx="2346745" cy="400110"/>
-          </a:xfrm>
-          <a:prstGeom prst="rect">
-            <a:avLst/>
-          </a:prstGeom>
-          <a:noFill/>
-        </p:spPr>
-        <p:txBody>
-          <a:bodyPr wrap="square" rtlCol="0">
-            <a:spAutoFit/>
-          </a:bodyPr>
-          <a:lstStyle/>
-          <a:p>
-            <a:r>
-              <a:rPr lang="en-US" sz="1000" dirty="0">
-                <a:latin typeface="HSE Sans" panose="02000000000000000000" pitchFamily="2" charset="0"/>
-              </a:rPr>
-              <a:t>Self-Evolving LLM Agents via Reflective Prompt and Tool-Schema Patching</a:t>
-            </a:r>
-          </a:p>
-        </p:txBody>
-      </p:sp>
-      <p:sp>
-        <p:nvSpPr>
-          <p:cNvPr id="42" name="TextBox 41">
-            <a:extLst>
-              <a:ext uri="{FF2B5EF4-FFF2-40B4-BE49-F238E27FC236}">
-                <a16:creationId xmlns:a16="http://schemas.microsoft.com/office/drawing/2014/main" id="{AF2EE3B1-6486-FC4E-869B-3E2E08E09E21}"/>
-              </a:ext>
-            </a:extLst>
-          </p:cNvPr>
-          <p:cNvSpPr txBox="1"/>
-          <p:nvPr/>
-        </p:nvSpPr>
-        <p:spPr>
-          <a:xfrm>
-            <a:off x="6158118" y="497315"/>
-            <a:ext cx="2346745" cy="246221"/>
-          </a:xfrm>
-          <a:prstGeom prst="rect">
-            <a:avLst/>
-          </a:prstGeom>
-          <a:noFill/>
-        </p:spPr>
-        <p:txBody>
-          <a:bodyPr wrap="square" rtlCol="0">
-            <a:spAutoFit/>
-          </a:bodyPr>
-          <a:lstStyle/>
-          <a:p>
-            <a:r>
-              <a:rPr lang="en-US" sz="1000" dirty="0">
-                <a:latin typeface="HSE Sans" panose="02000000000000000000" pitchFamily="2" charset="0"/>
-              </a:rPr>
-              <a:t>Results</a:t>
-            </a:r>
-            <a:endParaRPr lang="ru-RU" sz="1000" dirty="0">
-              <a:latin typeface="HSE Sans" panose="02000000000000000000" pitchFamily="2" charset="0"/>
-            </a:endParaRPr>
-          </a:p>
-        </p:txBody>
-      </p:sp>
-      <p:sp>
-        <p:nvSpPr>
-          <p:cNvPr id="10" name="TextBox 9">
-            <a:extLst>
-              <a:ext uri="{FF2B5EF4-FFF2-40B4-BE49-F238E27FC236}">
-                <a16:creationId xmlns:a16="http://schemas.microsoft.com/office/drawing/2014/main" id="{8ADDA0B3-83F9-4328-9E46-B65D7ECDBDC9}"/>
-              </a:ext>
-            </a:extLst>
-          </p:cNvPr>
-          <p:cNvSpPr txBox="1"/>
-          <p:nvPr/>
-        </p:nvSpPr>
-        <p:spPr>
-          <a:xfrm>
-            <a:off x="489975" y="1219873"/>
-            <a:ext cx="6097554" cy="307777"/>
-          </a:xfrm>
-          <a:prstGeom prst="rect">
-            <a:avLst/>
-          </a:prstGeom>
-          <a:noFill/>
-        </p:spPr>
-        <p:txBody>
-          <a:bodyPr wrap="square">
-            <a:spAutoFit/>
-          </a:bodyPr>
-          <a:lstStyle/>
-          <a:p>
-            <a:r>
-              <a:rPr lang="en-US" sz="1300" i="1" dirty="0">
-                <a:solidFill>
-                  <a:srgbClr val="333333"/>
-                </a:solidFill>
-                <a:latin typeface="HSE Sans" panose="02000000000000000000"/>
-                <a:ea typeface="Arial" pitchFamily="34" charset="-122"/>
-                <a:cs typeface="Arial" pitchFamily="34" charset="-120"/>
-              </a:rPr>
-              <a:t>Q2: </a:t>
-            </a:r>
-            <a:r>
-              <a:rPr lang="en-US" sz="1400" i="1" dirty="0">
-                <a:solidFill>
-                  <a:srgbClr val="333333"/>
-                </a:solidFill>
-                <a:latin typeface="HSE Sans" panose="02000000000000000000"/>
-                <a:ea typeface="Arial" pitchFamily="34" charset="-122"/>
-                <a:cs typeface="Arial" pitchFamily="34" charset="-120"/>
-              </a:rPr>
-              <a:t>How well does fix rate respond to task variety?</a:t>
-            </a:r>
-            <a:endParaRPr lang="en-US" sz="1400" i="1" dirty="0">
-              <a:latin typeface="HSE Sans" panose="02000000000000000000"/>
-            </a:endParaRPr>
-          </a:p>
-        </p:txBody>
-      </p:sp>
-      <p:pic>
-        <p:nvPicPr>
-          <p:cNvPr id="9" name="Graphic 8">
-            <a:extLst>
-              <a:ext uri="{FF2B5EF4-FFF2-40B4-BE49-F238E27FC236}">
-                <a16:creationId xmlns:a16="http://schemas.microsoft.com/office/drawing/2014/main" id="{8921C23F-499B-4858-99AC-A0A891A69ED0}"/>
-              </a:ext>
-            </a:extLst>
-          </p:cNvPr>
-          <p:cNvPicPr>
-            <a:picLocks noChangeAspect="1"/>
-          </p:cNvPicPr>
-          <p:nvPr/>
-        </p:nvPicPr>
-        <p:blipFill>
-          <a:blip r:embed="rId3" cstate="print">
-            <a:extLst>
-              <a:ext uri="{28A0092B-C50C-407E-A947-70E740481C1C}">
-                <a14:useLocalDpi xmlns:a14="http://schemas.microsoft.com/office/drawing/2010/main" val="0"/>
-              </a:ext>
-              <a:ext uri="{96DAC541-7B7A-43D3-8B79-37D633B846F1}">
-                <asvg:svgBlip xmlns:asvg="http://schemas.microsoft.com/office/drawing/2016/SVG/main" r:embed="rId4"/>
-              </a:ext>
-            </a:extLst>
-          </a:blip>
-          <a:stretch>
-            <a:fillRect/>
-          </a:stretch>
-        </p:blipFill>
-        <p:spPr>
-          <a:xfrm>
-            <a:off x="3394976" y="2358141"/>
-            <a:ext cx="2715597" cy="1508665"/>
-          </a:xfrm>
-          <a:prstGeom prst="rect">
-            <a:avLst/>
-          </a:prstGeom>
-        </p:spPr>
-      </p:pic>
-      <p:pic>
-        <p:nvPicPr>
-          <p:cNvPr id="12" name="Graphic 11">
-            <a:extLst>
-              <a:ext uri="{FF2B5EF4-FFF2-40B4-BE49-F238E27FC236}">
-                <a16:creationId xmlns:a16="http://schemas.microsoft.com/office/drawing/2014/main" id="{68DD533F-F488-4075-A897-BDE3F326BDB1}"/>
-              </a:ext>
-            </a:extLst>
-          </p:cNvPr>
-          <p:cNvPicPr>
-            <a:picLocks noChangeAspect="1"/>
-          </p:cNvPicPr>
-          <p:nvPr/>
-        </p:nvPicPr>
-        <p:blipFill>
-          <a:blip r:embed="rId5" cstate="print">
-            <a:extLst>
-              <a:ext uri="{28A0092B-C50C-407E-A947-70E740481C1C}">
-                <a14:useLocalDpi xmlns:a14="http://schemas.microsoft.com/office/drawing/2010/main" val="0"/>
-              </a:ext>
-              <a:ext uri="{96DAC541-7B7A-43D3-8B79-37D633B846F1}">
-                <asvg:svgBlip xmlns:asvg="http://schemas.microsoft.com/office/drawing/2016/SVG/main" r:embed="rId6"/>
-              </a:ext>
-            </a:extLst>
-          </a:blip>
-          <a:stretch>
-            <a:fillRect/>
-          </a:stretch>
-        </p:blipFill>
-        <p:spPr>
-          <a:xfrm>
-            <a:off x="6187467" y="2358141"/>
-            <a:ext cx="2715598" cy="1508666"/>
-          </a:xfrm>
-          <a:prstGeom prst="rect">
-            <a:avLst/>
-          </a:prstGeom>
-        </p:spPr>
-      </p:pic>
-      <p:pic>
-        <p:nvPicPr>
-          <p:cNvPr id="14" name="Graphic 13">
-            <a:extLst>
-              <a:ext uri="{FF2B5EF4-FFF2-40B4-BE49-F238E27FC236}">
-                <a16:creationId xmlns:a16="http://schemas.microsoft.com/office/drawing/2014/main" id="{33CE741F-5D19-4324-AFAA-DD0FBB174BF3}"/>
-              </a:ext>
-            </a:extLst>
-          </p:cNvPr>
-          <p:cNvPicPr>
-            <a:picLocks noChangeAspect="1"/>
-          </p:cNvPicPr>
-          <p:nvPr/>
-        </p:nvPicPr>
-        <p:blipFill>
-          <a:blip r:embed="rId7" cstate="print">
-            <a:extLst>
-              <a:ext uri="{28A0092B-C50C-407E-A947-70E740481C1C}">
-                <a14:useLocalDpi xmlns:a14="http://schemas.microsoft.com/office/drawing/2010/main" val="0"/>
-              </a:ext>
-              <a:ext uri="{96DAC541-7B7A-43D3-8B79-37D633B846F1}">
-                <asvg:svgBlip xmlns:asvg="http://schemas.microsoft.com/office/drawing/2016/SVG/main" r:embed="rId8"/>
-              </a:ext>
-            </a:extLst>
-          </a:blip>
-          <a:stretch>
-            <a:fillRect/>
-          </a:stretch>
-        </p:blipFill>
-        <p:spPr>
-          <a:xfrm>
-            <a:off x="8979959" y="2358046"/>
-            <a:ext cx="2715768" cy="1508760"/>
-          </a:xfrm>
-          <a:prstGeom prst="rect">
-            <a:avLst/>
-          </a:prstGeom>
-        </p:spPr>
-      </p:pic>
-      <p:pic>
-        <p:nvPicPr>
-          <p:cNvPr id="16" name="Graphic 15">
-            <a:extLst>
-              <a:ext uri="{FF2B5EF4-FFF2-40B4-BE49-F238E27FC236}">
-                <a16:creationId xmlns:a16="http://schemas.microsoft.com/office/drawing/2014/main" id="{CA4A1956-CC09-434B-B364-70F8E3199610}"/>
-              </a:ext>
-            </a:extLst>
-          </p:cNvPr>
-          <p:cNvPicPr>
-            <a:picLocks noChangeAspect="1"/>
-          </p:cNvPicPr>
-          <p:nvPr/>
-        </p:nvPicPr>
-        <p:blipFill>
-          <a:blip r:embed="rId9" cstate="print">
-            <a:extLst>
-              <a:ext uri="{28A0092B-C50C-407E-A947-70E740481C1C}">
-                <a14:useLocalDpi xmlns:a14="http://schemas.microsoft.com/office/drawing/2010/main" val="0"/>
-              </a:ext>
-              <a:ext uri="{96DAC541-7B7A-43D3-8B79-37D633B846F1}">
-                <asvg:svgBlip xmlns:asvg="http://schemas.microsoft.com/office/drawing/2016/SVG/main" r:embed="rId10"/>
-              </a:ext>
-            </a:extLst>
-          </a:blip>
-          <a:stretch>
-            <a:fillRect/>
-          </a:stretch>
-        </p:blipFill>
-        <p:spPr>
-          <a:xfrm>
-            <a:off x="3394805" y="5176462"/>
-            <a:ext cx="2715768" cy="1508760"/>
-          </a:xfrm>
-          <a:prstGeom prst="rect">
-            <a:avLst/>
-          </a:prstGeom>
-        </p:spPr>
-      </p:pic>
-      <p:pic>
-        <p:nvPicPr>
-          <p:cNvPr id="18" name="Graphic 17">
-            <a:extLst>
-              <a:ext uri="{FF2B5EF4-FFF2-40B4-BE49-F238E27FC236}">
-                <a16:creationId xmlns:a16="http://schemas.microsoft.com/office/drawing/2014/main" id="{F175FDCE-135B-486C-99F7-DE8BDEE4020C}"/>
-              </a:ext>
-            </a:extLst>
-          </p:cNvPr>
-          <p:cNvPicPr>
-            <a:picLocks noChangeAspect="1"/>
-          </p:cNvPicPr>
-          <p:nvPr/>
-        </p:nvPicPr>
-        <p:blipFill>
-          <a:blip r:embed="rId11" cstate="print">
-            <a:extLst>
-              <a:ext uri="{28A0092B-C50C-407E-A947-70E740481C1C}">
-                <a14:useLocalDpi xmlns:a14="http://schemas.microsoft.com/office/drawing/2010/main" val="0"/>
-              </a:ext>
-              <a:ext uri="{96DAC541-7B7A-43D3-8B79-37D633B846F1}">
-                <asvg:svgBlip xmlns:asvg="http://schemas.microsoft.com/office/drawing/2016/SVG/main" r:embed="rId12"/>
-              </a:ext>
-            </a:extLst>
-          </a:blip>
-          <a:stretch>
-            <a:fillRect/>
-          </a:stretch>
-        </p:blipFill>
-        <p:spPr>
-          <a:xfrm>
-            <a:off x="6187297" y="5178237"/>
-            <a:ext cx="2715768" cy="1508760"/>
-          </a:xfrm>
-          <a:prstGeom prst="rect">
-            <a:avLst/>
-          </a:prstGeom>
-        </p:spPr>
-      </p:pic>
-      <p:pic>
-        <p:nvPicPr>
-          <p:cNvPr id="20" name="Graphic 19">
-            <a:extLst>
-              <a:ext uri="{FF2B5EF4-FFF2-40B4-BE49-F238E27FC236}">
-                <a16:creationId xmlns:a16="http://schemas.microsoft.com/office/drawing/2014/main" id="{259F40D0-3F8A-4B7E-9652-623E549CB442}"/>
-              </a:ext>
-            </a:extLst>
-          </p:cNvPr>
-          <p:cNvPicPr>
-            <a:picLocks noChangeAspect="1"/>
-          </p:cNvPicPr>
-          <p:nvPr/>
-        </p:nvPicPr>
-        <p:blipFill>
-          <a:blip r:embed="rId13" cstate="print">
-            <a:extLst>
-              <a:ext uri="{28A0092B-C50C-407E-A947-70E740481C1C}">
-                <a14:useLocalDpi xmlns:a14="http://schemas.microsoft.com/office/drawing/2010/main" val="0"/>
-              </a:ext>
-              <a:ext uri="{96DAC541-7B7A-43D3-8B79-37D633B846F1}">
-                <asvg:svgBlip xmlns:asvg="http://schemas.microsoft.com/office/drawing/2016/SVG/main" r:embed="rId14"/>
-              </a:ext>
-            </a:extLst>
-          </a:blip>
-          <a:stretch>
-            <a:fillRect/>
-          </a:stretch>
-        </p:blipFill>
-        <p:spPr>
-          <a:xfrm>
-            <a:off x="6187297" y="3768142"/>
-            <a:ext cx="2715768" cy="1508760"/>
-          </a:xfrm>
-          <a:prstGeom prst="rect">
-            <a:avLst/>
-          </a:prstGeom>
-        </p:spPr>
-      </p:pic>
-      <p:pic>
-        <p:nvPicPr>
-          <p:cNvPr id="22" name="Graphic 21">
-            <a:extLst>
-              <a:ext uri="{FF2B5EF4-FFF2-40B4-BE49-F238E27FC236}">
-                <a16:creationId xmlns:a16="http://schemas.microsoft.com/office/drawing/2014/main" id="{D4C283B1-E7E8-427B-9E6E-818A92BF2B3C}"/>
-              </a:ext>
-            </a:extLst>
-          </p:cNvPr>
-          <p:cNvPicPr>
-            <a:picLocks noChangeAspect="1"/>
-          </p:cNvPicPr>
-          <p:nvPr/>
-        </p:nvPicPr>
-        <p:blipFill>
-          <a:blip r:embed="rId15" cstate="print">
-            <a:extLst>
-              <a:ext uri="{28A0092B-C50C-407E-A947-70E740481C1C}">
-                <a14:useLocalDpi xmlns:a14="http://schemas.microsoft.com/office/drawing/2010/main" val="0"/>
-              </a:ext>
-              <a:ext uri="{96DAC541-7B7A-43D3-8B79-37D633B846F1}">
-                <asvg:svgBlip xmlns:asvg="http://schemas.microsoft.com/office/drawing/2016/SVG/main" r:embed="rId16"/>
-              </a:ext>
-            </a:extLst>
-          </a:blip>
-          <a:stretch>
-            <a:fillRect/>
-          </a:stretch>
-        </p:blipFill>
-        <p:spPr>
-          <a:xfrm>
-            <a:off x="8979789" y="3768142"/>
-            <a:ext cx="2715768" cy="1508760"/>
-          </a:xfrm>
-          <a:prstGeom prst="rect">
-            <a:avLst/>
-          </a:prstGeom>
-        </p:spPr>
-      </p:pic>
-      <p:sp>
-        <p:nvSpPr>
-          <p:cNvPr id="29" name="TextBox 28">
-            <a:extLst>
-              <a:ext uri="{FF2B5EF4-FFF2-40B4-BE49-F238E27FC236}">
-                <a16:creationId xmlns:a16="http://schemas.microsoft.com/office/drawing/2014/main" id="{996930FA-D289-40D0-8194-E99C7EE74483}"/>
-              </a:ext>
-            </a:extLst>
-          </p:cNvPr>
-          <p:cNvSpPr txBox="1"/>
-          <p:nvPr/>
-        </p:nvSpPr>
-        <p:spPr>
-          <a:xfrm>
-            <a:off x="9288731" y="5599351"/>
-            <a:ext cx="2286000" cy="646331"/>
-          </a:xfrm>
-          <a:prstGeom prst="rect">
-            <a:avLst/>
-          </a:prstGeom>
-          <a:noFill/>
-        </p:spPr>
-        <p:txBody>
-          <a:bodyPr wrap="square" rtlCol="0">
-            <a:spAutoFit/>
-          </a:bodyPr>
-          <a:lstStyle/>
-          <a:p>
-            <a:r>
-              <a:rPr lang="en-US" dirty="0"/>
-              <a:t>Not tested due to continuous regression</a:t>
-            </a:r>
-          </a:p>
-        </p:txBody>
-      </p:sp>
-      <p:sp>
-        <p:nvSpPr>
-          <p:cNvPr id="32" name="TextBox 31">
-            <a:extLst>
-              <a:ext uri="{FF2B5EF4-FFF2-40B4-BE49-F238E27FC236}">
-                <a16:creationId xmlns:a16="http://schemas.microsoft.com/office/drawing/2014/main" id="{71D8B828-CFC2-4E7E-8E9F-C7F81CC7C391}"/>
-              </a:ext>
-            </a:extLst>
-          </p:cNvPr>
-          <p:cNvSpPr txBox="1"/>
-          <p:nvPr/>
-        </p:nvSpPr>
-        <p:spPr>
-          <a:xfrm>
-            <a:off x="3712326" y="4189350"/>
-            <a:ext cx="2286000" cy="646331"/>
-          </a:xfrm>
-          <a:prstGeom prst="rect">
-            <a:avLst/>
-          </a:prstGeom>
-          <a:noFill/>
-        </p:spPr>
-        <p:txBody>
-          <a:bodyPr wrap="square" rtlCol="0">
-            <a:spAutoFit/>
-          </a:bodyPr>
-          <a:lstStyle/>
-          <a:p>
-            <a:r>
-              <a:rPr lang="en-US" dirty="0"/>
-              <a:t>Nothing to fix; </a:t>
-            </a:r>
-            <a:br>
-              <a:rPr lang="en-US" dirty="0"/>
-            </a:br>
-            <a:r>
-              <a:rPr lang="en-US" dirty="0"/>
-              <a:t>all green</a:t>
-            </a:r>
-          </a:p>
-        </p:txBody>
-      </p:sp>
-      <p:sp>
-        <p:nvSpPr>
-          <p:cNvPr id="33" name="TextBox 32">
-            <a:extLst>
-              <a:ext uri="{FF2B5EF4-FFF2-40B4-BE49-F238E27FC236}">
-                <a16:creationId xmlns:a16="http://schemas.microsoft.com/office/drawing/2014/main" id="{B4254EBD-80CA-4510-B0CC-B45047A5C6A3}"/>
-              </a:ext>
-            </a:extLst>
-          </p:cNvPr>
-          <p:cNvSpPr txBox="1"/>
-          <p:nvPr/>
-        </p:nvSpPr>
-        <p:spPr>
-          <a:xfrm>
-            <a:off x="3922206" y="2074913"/>
-            <a:ext cx="1866239" cy="292388"/>
-          </a:xfrm>
-          <a:prstGeom prst="rect">
-            <a:avLst/>
-          </a:prstGeom>
-          <a:noFill/>
-        </p:spPr>
-        <p:txBody>
-          <a:bodyPr wrap="square">
-            <a:spAutoFit/>
-          </a:bodyPr>
-          <a:lstStyle/>
-          <a:p>
-            <a:pPr algn="ctr"/>
-            <a:r>
-              <a:rPr lang="en-US" sz="1300" dirty="0">
-                <a:solidFill>
-                  <a:srgbClr val="333333"/>
-                </a:solidFill>
-                <a:latin typeface="HSE Sans" panose="02000000000000000000"/>
-                <a:ea typeface="Arial" pitchFamily="34" charset="-122"/>
-                <a:cs typeface="Arial" pitchFamily="34" charset="-120"/>
-              </a:rPr>
-              <a:t>5 tasks</a:t>
-            </a:r>
-            <a:endParaRPr lang="en-US" sz="1400" dirty="0">
-              <a:latin typeface="HSE Sans" panose="02000000000000000000"/>
-            </a:endParaRPr>
-          </a:p>
-        </p:txBody>
-      </p:sp>
-      <p:sp>
-        <p:nvSpPr>
-          <p:cNvPr id="34" name="TextBox 33">
-            <a:extLst>
-              <a:ext uri="{FF2B5EF4-FFF2-40B4-BE49-F238E27FC236}">
-                <a16:creationId xmlns:a16="http://schemas.microsoft.com/office/drawing/2014/main" id="{34E7252D-35AF-48CA-B622-596CFEF13FDC}"/>
-              </a:ext>
-            </a:extLst>
-          </p:cNvPr>
-          <p:cNvSpPr txBox="1"/>
-          <p:nvPr/>
-        </p:nvSpPr>
-        <p:spPr>
-          <a:xfrm>
-            <a:off x="6730720" y="2074913"/>
-            <a:ext cx="1866239" cy="292388"/>
-          </a:xfrm>
-          <a:prstGeom prst="rect">
-            <a:avLst/>
-          </a:prstGeom>
-          <a:noFill/>
-        </p:spPr>
-        <p:txBody>
-          <a:bodyPr wrap="square">
-            <a:spAutoFit/>
-          </a:bodyPr>
-          <a:lstStyle/>
-          <a:p>
-            <a:pPr algn="ctr"/>
-            <a:r>
-              <a:rPr lang="en-US" sz="1300" dirty="0">
-                <a:solidFill>
-                  <a:srgbClr val="333333"/>
-                </a:solidFill>
-                <a:latin typeface="HSE Sans" panose="02000000000000000000"/>
-                <a:ea typeface="Arial" pitchFamily="34" charset="-122"/>
-                <a:cs typeface="Arial" pitchFamily="34" charset="-120"/>
-              </a:rPr>
-              <a:t>10 tasks</a:t>
-            </a:r>
-            <a:endParaRPr lang="en-US" sz="1400" dirty="0">
-              <a:latin typeface="HSE Sans" panose="02000000000000000000"/>
-            </a:endParaRPr>
-          </a:p>
-        </p:txBody>
-      </p:sp>
-      <p:sp>
-        <p:nvSpPr>
-          <p:cNvPr id="35" name="TextBox 34">
-            <a:extLst>
-              <a:ext uri="{FF2B5EF4-FFF2-40B4-BE49-F238E27FC236}">
-                <a16:creationId xmlns:a16="http://schemas.microsoft.com/office/drawing/2014/main" id="{93A58E4D-1969-44F9-A006-EFEFCEDADBBA}"/>
-              </a:ext>
-            </a:extLst>
-          </p:cNvPr>
-          <p:cNvSpPr txBox="1"/>
-          <p:nvPr/>
-        </p:nvSpPr>
-        <p:spPr>
-          <a:xfrm>
-            <a:off x="9498611" y="2074913"/>
-            <a:ext cx="1866239" cy="292388"/>
-          </a:xfrm>
-          <a:prstGeom prst="rect">
-            <a:avLst/>
-          </a:prstGeom>
-          <a:noFill/>
-        </p:spPr>
-        <p:txBody>
-          <a:bodyPr wrap="square">
-            <a:spAutoFit/>
-          </a:bodyPr>
-          <a:lstStyle/>
-          <a:p>
-            <a:pPr algn="ctr"/>
-            <a:r>
-              <a:rPr lang="en-US" sz="1300" dirty="0">
-                <a:solidFill>
-                  <a:srgbClr val="333333"/>
-                </a:solidFill>
-                <a:latin typeface="HSE Sans" panose="02000000000000000000"/>
-                <a:ea typeface="Arial" pitchFamily="34" charset="-122"/>
-                <a:cs typeface="Arial" pitchFamily="34" charset="-120"/>
-              </a:rPr>
-              <a:t>20 tasks</a:t>
-            </a:r>
-            <a:endParaRPr lang="en-US" sz="1400" dirty="0">
-              <a:latin typeface="HSE Sans" panose="02000000000000000000"/>
-            </a:endParaRPr>
-          </a:p>
-        </p:txBody>
-      </p:sp>
-      <p:sp>
-        <p:nvSpPr>
-          <p:cNvPr id="36" name="TextBox 35">
-            <a:extLst>
-              <a:ext uri="{FF2B5EF4-FFF2-40B4-BE49-F238E27FC236}">
-                <a16:creationId xmlns:a16="http://schemas.microsoft.com/office/drawing/2014/main" id="{E62990E4-409C-4AF2-BCF4-3759A2A333EB}"/>
-              </a:ext>
-            </a:extLst>
-          </p:cNvPr>
-          <p:cNvSpPr txBox="1"/>
-          <p:nvPr/>
-        </p:nvSpPr>
-        <p:spPr>
-          <a:xfrm rot="16200000">
-            <a:off x="2345879" y="2940066"/>
-            <a:ext cx="1866239" cy="292388"/>
-          </a:xfrm>
-          <a:prstGeom prst="rect">
-            <a:avLst/>
-          </a:prstGeom>
-          <a:noFill/>
-        </p:spPr>
-        <p:txBody>
-          <a:bodyPr wrap="square">
-            <a:spAutoFit/>
-          </a:bodyPr>
-          <a:lstStyle/>
-          <a:p>
-            <a:pPr algn="ctr"/>
-            <a:r>
-              <a:rPr lang="en-US" sz="1300" dirty="0" err="1">
-                <a:solidFill>
-                  <a:srgbClr val="333333"/>
-                </a:solidFill>
-                <a:latin typeface="HSE Sans" panose="02000000000000000000"/>
-                <a:ea typeface="Arial" pitchFamily="34" charset="-122"/>
-                <a:cs typeface="Arial" pitchFamily="34" charset="-120"/>
-              </a:rPr>
-              <a:t>Qwen</a:t>
-            </a:r>
-            <a:r>
-              <a:rPr lang="en-US" sz="1300" dirty="0">
-                <a:solidFill>
-                  <a:srgbClr val="333333"/>
-                </a:solidFill>
-                <a:latin typeface="HSE Sans" panose="02000000000000000000"/>
-                <a:ea typeface="Arial" pitchFamily="34" charset="-122"/>
-                <a:cs typeface="Arial" pitchFamily="34" charset="-120"/>
-              </a:rPr>
-              <a:t> 3</a:t>
-            </a:r>
-            <a:endParaRPr lang="en-US" sz="1400" dirty="0">
-              <a:latin typeface="HSE Sans" panose="02000000000000000000"/>
-            </a:endParaRPr>
-          </a:p>
-        </p:txBody>
-      </p:sp>
-      <p:sp>
-        <p:nvSpPr>
-          <p:cNvPr id="37" name="TextBox 36">
-            <a:extLst>
-              <a:ext uri="{FF2B5EF4-FFF2-40B4-BE49-F238E27FC236}">
-                <a16:creationId xmlns:a16="http://schemas.microsoft.com/office/drawing/2014/main" id="{1F66FFBF-3C7B-48BB-B38B-AB584F32DD93}"/>
-              </a:ext>
-            </a:extLst>
-          </p:cNvPr>
-          <p:cNvSpPr txBox="1"/>
-          <p:nvPr/>
-        </p:nvSpPr>
-        <p:spPr>
-          <a:xfrm rot="16200000">
-            <a:off x="2340653" y="4386307"/>
-            <a:ext cx="1866239" cy="292388"/>
-          </a:xfrm>
-          <a:prstGeom prst="rect">
-            <a:avLst/>
-          </a:prstGeom>
-          <a:noFill/>
-        </p:spPr>
-        <p:txBody>
-          <a:bodyPr wrap="square">
-            <a:spAutoFit/>
-          </a:bodyPr>
-          <a:lstStyle/>
-          <a:p>
-            <a:pPr algn="ctr"/>
-            <a:r>
-              <a:rPr lang="en-US" sz="1300" dirty="0" err="1">
-                <a:solidFill>
-                  <a:srgbClr val="333333"/>
-                </a:solidFill>
-                <a:latin typeface="HSE Sans" panose="02000000000000000000"/>
-                <a:ea typeface="Arial" pitchFamily="34" charset="-122"/>
-                <a:cs typeface="Arial" pitchFamily="34" charset="-120"/>
-              </a:rPr>
-              <a:t>Qwen</a:t>
-            </a:r>
-            <a:r>
-              <a:rPr lang="en-US" sz="1300" dirty="0">
-                <a:solidFill>
-                  <a:srgbClr val="333333"/>
-                </a:solidFill>
-                <a:latin typeface="HSE Sans" panose="02000000000000000000"/>
-                <a:ea typeface="Arial" pitchFamily="34" charset="-122"/>
-                <a:cs typeface="Arial" pitchFamily="34" charset="-120"/>
-              </a:rPr>
-              <a:t> 3.5</a:t>
-            </a:r>
-            <a:endParaRPr lang="en-US" sz="1400" dirty="0">
-              <a:latin typeface="HSE Sans" panose="02000000000000000000"/>
-            </a:endParaRPr>
-          </a:p>
-        </p:txBody>
-      </p:sp>
-      <p:sp>
-        <p:nvSpPr>
-          <p:cNvPr id="38" name="TextBox 37">
-            <a:extLst>
-              <a:ext uri="{FF2B5EF4-FFF2-40B4-BE49-F238E27FC236}">
-                <a16:creationId xmlns:a16="http://schemas.microsoft.com/office/drawing/2014/main" id="{0A40C63E-EEF1-4B91-945F-7912B60681A2}"/>
-              </a:ext>
-            </a:extLst>
-          </p:cNvPr>
-          <p:cNvSpPr txBox="1"/>
-          <p:nvPr/>
-        </p:nvSpPr>
-        <p:spPr>
-          <a:xfrm rot="16200000">
-            <a:off x="2358767" y="5762716"/>
-            <a:ext cx="1866239" cy="292388"/>
-          </a:xfrm>
-          <a:prstGeom prst="rect">
-            <a:avLst/>
-          </a:prstGeom>
-          <a:noFill/>
-        </p:spPr>
-        <p:txBody>
-          <a:bodyPr wrap="square">
-            <a:spAutoFit/>
-          </a:bodyPr>
-          <a:lstStyle/>
-          <a:p>
-            <a:pPr algn="ctr"/>
-            <a:r>
-              <a:rPr lang="en-US" sz="1300" dirty="0">
-                <a:solidFill>
-                  <a:srgbClr val="333333"/>
-                </a:solidFill>
-                <a:latin typeface="HSE Sans" panose="02000000000000000000"/>
-                <a:ea typeface="Arial" pitchFamily="34" charset="-122"/>
-                <a:cs typeface="Arial" pitchFamily="34" charset="-120"/>
-              </a:rPr>
-              <a:t>GLM 4.7</a:t>
-            </a:r>
-            <a:endParaRPr lang="en-US" sz="1400" dirty="0">
-              <a:latin typeface="HSE Sans" panose="02000000000000000000"/>
-            </a:endParaRPr>
-          </a:p>
-        </p:txBody>
-      </p:sp>
-      <p:sp>
-        <p:nvSpPr>
-          <p:cNvPr id="39" name="TextBox 38">
-            <a:extLst>
-              <a:ext uri="{FF2B5EF4-FFF2-40B4-BE49-F238E27FC236}">
-                <a16:creationId xmlns:a16="http://schemas.microsoft.com/office/drawing/2014/main" id="{FF6CD6AE-E372-495E-A90C-91A8875C7BA8}"/>
-              </a:ext>
-            </a:extLst>
-          </p:cNvPr>
-          <p:cNvSpPr txBox="1"/>
-          <p:nvPr/>
-        </p:nvSpPr>
-        <p:spPr>
-          <a:xfrm>
-            <a:off x="288946" y="2575221"/>
-            <a:ext cx="2649661" cy="3600986"/>
-          </a:xfrm>
-          <a:prstGeom prst="rect">
-            <a:avLst/>
-          </a:prstGeom>
-          <a:noFill/>
-        </p:spPr>
-        <p:txBody>
-          <a:bodyPr wrap="square" rtlCol="0">
-            <a:spAutoFit/>
-          </a:bodyPr>
-          <a:lstStyle/>
-          <a:p>
-            <a:pPr marL="342900" indent="-342900">
-              <a:spcAft>
-                <a:spcPts val="1200"/>
-              </a:spcAft>
-              <a:buAutoNum type="arabicPeriod"/>
-            </a:pPr>
-            <a:r>
-              <a:rPr lang="en-US" sz="1600" dirty="0">
-                <a:latin typeface="HSE Sans" panose="02000000000000000000"/>
-              </a:rPr>
-              <a:t>Some models just can’t get any benefits from prompt tuning – e.g. GLM 4.7</a:t>
-            </a:r>
-          </a:p>
-          <a:p>
-            <a:pPr marL="342900" indent="-342900">
-              <a:spcAft>
-                <a:spcPts val="1200"/>
-              </a:spcAft>
-              <a:buAutoNum type="arabicPeriod"/>
-            </a:pPr>
-            <a:r>
-              <a:rPr lang="en-US" sz="1600" dirty="0">
-                <a:latin typeface="HSE Sans" panose="02000000000000000000"/>
-              </a:rPr>
-              <a:t>All models poorly retain of pass rate improvement - sweep 1 has 100% fix rate, only half persist to sweep 3</a:t>
-            </a:r>
-          </a:p>
-          <a:p>
-            <a:pPr marL="342900" indent="-342900">
-              <a:spcAft>
-                <a:spcPts val="1200"/>
-              </a:spcAft>
-              <a:buAutoNum type="arabicPeriod"/>
-            </a:pPr>
-            <a:r>
-              <a:rPr lang="en-US" sz="1600" dirty="0">
-                <a:latin typeface="HSE Sans" panose="02000000000000000000"/>
-              </a:rPr>
-              <a:t>The stronger the model, the more it retains -&gt; </a:t>
-            </a:r>
-            <a:r>
-              <a:rPr lang="en-US" sz="1600" dirty="0" err="1">
-                <a:latin typeface="HSE Sans" panose="02000000000000000000"/>
-              </a:rPr>
-              <a:t>Qwen</a:t>
-            </a:r>
-            <a:r>
-              <a:rPr lang="en-US" sz="1600" dirty="0">
-                <a:latin typeface="HSE Sans" panose="02000000000000000000"/>
-              </a:rPr>
-              <a:t> 3.5 is superior to </a:t>
-            </a:r>
-            <a:r>
-              <a:rPr lang="en-US" sz="1600" dirty="0" err="1">
-                <a:latin typeface="HSE Sans" panose="02000000000000000000"/>
-              </a:rPr>
-              <a:t>Qwen</a:t>
-            </a:r>
-            <a:r>
-              <a:rPr lang="en-US" sz="1600" dirty="0">
-                <a:latin typeface="HSE Sans" panose="02000000000000000000"/>
-              </a:rPr>
-              <a:t> 3</a:t>
-            </a:r>
-          </a:p>
-        </p:txBody>
-      </p:sp>
-    </p:spTree>
-    <p:extLst>
-      <p:ext uri="{BB962C8B-B14F-4D97-AF65-F5344CB8AC3E}">
-        <p14:creationId xmlns:p14="http://schemas.microsoft.com/office/powerpoint/2010/main" val="1464276727"/>
-      </p:ext>
-    </p:extLst>
-  </p:cSld>
-  <p:clrMapOvr>
-    <a:masterClrMapping/>
-  </p:clrMapOvr>
-</p:sld>
-</file>
-
 <file path=ppt/slides/slide13.xml><?xml version="1.0" encoding="utf-8"?>
 <p:sld xmlns:a="http://schemas.openxmlformats.org/drawingml/2006/main" xmlns:r="http://schemas.openxmlformats.org/officeDocument/2006/relationships" xmlns:p="http://schemas.openxmlformats.org/presentationml/2006/main">
   <p:cSld>
@@ -13524,6 +13054,1187 @@
                 </a:solidFill>
                 <a:latin typeface="HSE Sans" panose="02000000000000000000" pitchFamily="2" charset="0"/>
               </a:rPr>
+              <a:t>12</a:t>
+            </a:r>
+            <a:endParaRPr lang="ru-RU" sz="2000" dirty="0">
+              <a:solidFill>
+                <a:srgbClr val="102D69"/>
+              </a:solidFill>
+              <a:latin typeface="HSE Sans" panose="02000000000000000000" pitchFamily="2" charset="0"/>
+            </a:endParaRPr>
+          </a:p>
+        </p:txBody>
+      </p:sp>
+      <p:sp>
+        <p:nvSpPr>
+          <p:cNvPr id="27" name="TextBox 26">
+            <a:extLst>
+              <a:ext uri="{FF2B5EF4-FFF2-40B4-BE49-F238E27FC236}">
+                <a16:creationId xmlns:a16="http://schemas.microsoft.com/office/drawing/2014/main" id="{E44D712D-40F7-624C-A601-9C19E270CD4C}"/>
+              </a:ext>
+            </a:extLst>
+          </p:cNvPr>
+          <p:cNvSpPr txBox="1"/>
+          <p:nvPr/>
+        </p:nvSpPr>
+        <p:spPr>
+          <a:xfrm>
+            <a:off x="489975" y="1396903"/>
+            <a:ext cx="10638335" cy="461665"/>
+          </a:xfrm>
+          <a:prstGeom prst="rect">
+            <a:avLst/>
+          </a:prstGeom>
+          <a:noFill/>
+        </p:spPr>
+        <p:txBody>
+          <a:bodyPr wrap="square" rtlCol="0" anchor="t" anchorCtr="0">
+            <a:spAutoFit/>
+          </a:bodyPr>
+          <a:lstStyle/>
+          <a:p>
+            <a:r>
+              <a:rPr lang="en-US" sz="2400" dirty="0">
+                <a:solidFill>
+                  <a:srgbClr val="102D69"/>
+                </a:solidFill>
+                <a:latin typeface="HSE Sans" panose="02000000000000000000" pitchFamily="2" charset="0"/>
+              </a:rPr>
+              <a:t>F2: More tasks -&gt; lower the fix rate, but with caveats</a:t>
+            </a:r>
+            <a:endParaRPr lang="ru-RU" sz="2400" dirty="0">
+              <a:solidFill>
+                <a:srgbClr val="102D69"/>
+              </a:solidFill>
+              <a:latin typeface="HSE Sans" panose="02000000000000000000" pitchFamily="2" charset="0"/>
+            </a:endParaRPr>
+          </a:p>
+        </p:txBody>
+      </p:sp>
+      <p:cxnSp>
+        <p:nvCxnSpPr>
+          <p:cNvPr id="28" name="Straight Connector 13">
+            <a:extLst>
+              <a:ext uri="{FF2B5EF4-FFF2-40B4-BE49-F238E27FC236}">
+                <a16:creationId xmlns:a16="http://schemas.microsoft.com/office/drawing/2014/main" id="{62E2D9CC-0CF4-324B-BFF1-AC830802DEEB}"/>
+              </a:ext>
+            </a:extLst>
+          </p:cNvPr>
+          <p:cNvCxnSpPr>
+            <a:cxnSpLocks/>
+          </p:cNvCxnSpPr>
+          <p:nvPr/>
+        </p:nvCxnSpPr>
+        <p:spPr>
+          <a:xfrm>
+            <a:off x="11643868" y="464363"/>
+            <a:ext cx="0" cy="586260"/>
+          </a:xfrm>
+          <a:prstGeom prst="line">
+            <a:avLst/>
+          </a:prstGeom>
+          <a:ln w="12700">
+            <a:solidFill>
+              <a:srgbClr val="102D69"/>
+            </a:solidFill>
+          </a:ln>
+        </p:spPr>
+        <p:style>
+          <a:lnRef idx="1">
+            <a:schemeClr val="accent1"/>
+          </a:lnRef>
+          <a:fillRef idx="0">
+            <a:schemeClr val="accent1"/>
+          </a:fillRef>
+          <a:effectRef idx="0">
+            <a:schemeClr val="accent1"/>
+          </a:effectRef>
+          <a:fontRef idx="minor">
+            <a:schemeClr val="tx1"/>
+          </a:fontRef>
+        </p:style>
+      </p:cxnSp>
+      <p:sp>
+        <p:nvSpPr>
+          <p:cNvPr id="41" name="TextBox 40">
+            <a:extLst>
+              <a:ext uri="{FF2B5EF4-FFF2-40B4-BE49-F238E27FC236}">
+                <a16:creationId xmlns:a16="http://schemas.microsoft.com/office/drawing/2014/main" id="{C3B50D95-E8C8-FD48-AEBE-39A9FC1A091E}"/>
+              </a:ext>
+            </a:extLst>
+          </p:cNvPr>
+          <p:cNvSpPr txBox="1"/>
+          <p:nvPr/>
+        </p:nvSpPr>
+        <p:spPr>
+          <a:xfrm>
+            <a:off x="3365627" y="497315"/>
+            <a:ext cx="2346745" cy="553998"/>
+          </a:xfrm>
+          <a:prstGeom prst="rect">
+            <a:avLst/>
+          </a:prstGeom>
+          <a:noFill/>
+        </p:spPr>
+        <p:txBody>
+          <a:bodyPr wrap="square" rtlCol="0">
+            <a:spAutoFit/>
+          </a:bodyPr>
+          <a:lstStyle/>
+          <a:p>
+            <a:r>
+              <a:rPr lang="en-US" sz="1000" dirty="0">
+                <a:latin typeface="HSE Sans" panose="02000000000000000000" pitchFamily="2" charset="0"/>
+              </a:rPr>
+              <a:t>Automatically Evolving Multi-Turn</a:t>
+            </a:r>
+            <a:br>
+              <a:rPr lang="en-US" sz="1000" dirty="0">
+                <a:latin typeface="HSE Sans" panose="02000000000000000000" pitchFamily="2" charset="0"/>
+              </a:rPr>
+            </a:br>
+            <a:r>
+              <a:rPr lang="en-US" sz="1000" dirty="0">
+                <a:latin typeface="HSE Sans" panose="02000000000000000000" pitchFamily="2" charset="0"/>
+              </a:rPr>
+              <a:t>Customer Service AI Agents via Prompt-Level Distillation</a:t>
+            </a:r>
+          </a:p>
+        </p:txBody>
+      </p:sp>
+      <p:sp>
+        <p:nvSpPr>
+          <p:cNvPr id="42" name="TextBox 41">
+            <a:extLst>
+              <a:ext uri="{FF2B5EF4-FFF2-40B4-BE49-F238E27FC236}">
+                <a16:creationId xmlns:a16="http://schemas.microsoft.com/office/drawing/2014/main" id="{AF2EE3B1-6486-FC4E-869B-3E2E08E09E21}"/>
+              </a:ext>
+            </a:extLst>
+          </p:cNvPr>
+          <p:cNvSpPr txBox="1"/>
+          <p:nvPr/>
+        </p:nvSpPr>
+        <p:spPr>
+          <a:xfrm>
+            <a:off x="6158118" y="497315"/>
+            <a:ext cx="2346745" cy="246221"/>
+          </a:xfrm>
+          <a:prstGeom prst="rect">
+            <a:avLst/>
+          </a:prstGeom>
+          <a:noFill/>
+        </p:spPr>
+        <p:txBody>
+          <a:bodyPr wrap="square" rtlCol="0">
+            <a:spAutoFit/>
+          </a:bodyPr>
+          <a:lstStyle/>
+          <a:p>
+            <a:r>
+              <a:rPr lang="en-US" sz="1000" dirty="0">
+                <a:latin typeface="HSE Sans" panose="02000000000000000000" pitchFamily="2" charset="0"/>
+              </a:rPr>
+              <a:t>Results</a:t>
+            </a:r>
+            <a:endParaRPr lang="ru-RU" sz="1000" dirty="0">
+              <a:latin typeface="HSE Sans" panose="02000000000000000000" pitchFamily="2" charset="0"/>
+            </a:endParaRPr>
+          </a:p>
+        </p:txBody>
+      </p:sp>
+      <p:sp>
+        <p:nvSpPr>
+          <p:cNvPr id="10" name="TextBox 9">
+            <a:extLst>
+              <a:ext uri="{FF2B5EF4-FFF2-40B4-BE49-F238E27FC236}">
+                <a16:creationId xmlns:a16="http://schemas.microsoft.com/office/drawing/2014/main" id="{8ADDA0B3-83F9-4328-9E46-B65D7ECDBDC9}"/>
+              </a:ext>
+            </a:extLst>
+          </p:cNvPr>
+          <p:cNvSpPr txBox="1"/>
+          <p:nvPr/>
+        </p:nvSpPr>
+        <p:spPr>
+          <a:xfrm>
+            <a:off x="489975" y="1219873"/>
+            <a:ext cx="6097554" cy="307777"/>
+          </a:xfrm>
+          <a:prstGeom prst="rect">
+            <a:avLst/>
+          </a:prstGeom>
+          <a:noFill/>
+        </p:spPr>
+        <p:txBody>
+          <a:bodyPr wrap="square">
+            <a:spAutoFit/>
+          </a:bodyPr>
+          <a:lstStyle/>
+          <a:p>
+            <a:r>
+              <a:rPr lang="en-US" sz="1300" i="1" dirty="0">
+                <a:solidFill>
+                  <a:srgbClr val="333333"/>
+                </a:solidFill>
+                <a:latin typeface="HSE Sans" panose="02000000000000000000"/>
+                <a:ea typeface="Arial" pitchFamily="34" charset="-122"/>
+                <a:cs typeface="Arial" pitchFamily="34" charset="-120"/>
+              </a:rPr>
+              <a:t>Q2: </a:t>
+            </a:r>
+            <a:r>
+              <a:rPr lang="en-US" sz="1400" i="1" dirty="0">
+                <a:solidFill>
+                  <a:srgbClr val="333333"/>
+                </a:solidFill>
+                <a:latin typeface="HSE Sans" panose="02000000000000000000"/>
+                <a:ea typeface="Arial" pitchFamily="34" charset="-122"/>
+                <a:cs typeface="Arial" pitchFamily="34" charset="-120"/>
+              </a:rPr>
+              <a:t>How well does fix rate respond to task variety?</a:t>
+            </a:r>
+            <a:endParaRPr lang="en-US" sz="1400" i="1" dirty="0">
+              <a:latin typeface="HSE Sans" panose="02000000000000000000"/>
+            </a:endParaRPr>
+          </a:p>
+        </p:txBody>
+      </p:sp>
+      <p:pic>
+        <p:nvPicPr>
+          <p:cNvPr id="9" name="Graphic 8">
+            <a:extLst>
+              <a:ext uri="{FF2B5EF4-FFF2-40B4-BE49-F238E27FC236}">
+                <a16:creationId xmlns:a16="http://schemas.microsoft.com/office/drawing/2014/main" id="{8921C23F-499B-4858-99AC-A0A891A69ED0}"/>
+              </a:ext>
+            </a:extLst>
+          </p:cNvPr>
+          <p:cNvPicPr>
+            <a:picLocks noChangeAspect="1"/>
+          </p:cNvPicPr>
+          <p:nvPr/>
+        </p:nvPicPr>
+        <p:blipFill>
+          <a:blip r:embed="rId3" cstate="print">
+            <a:extLst>
+              <a:ext uri="{28A0092B-C50C-407E-A947-70E740481C1C}">
+                <a14:useLocalDpi xmlns:a14="http://schemas.microsoft.com/office/drawing/2010/main" val="0"/>
+              </a:ext>
+              <a:ext uri="{96DAC541-7B7A-43D3-8B79-37D633B846F1}">
+                <asvg:svgBlip xmlns:asvg="http://schemas.microsoft.com/office/drawing/2016/SVG/main" r:embed="rId4"/>
+              </a:ext>
+            </a:extLst>
+          </a:blip>
+          <a:stretch>
+            <a:fillRect/>
+          </a:stretch>
+        </p:blipFill>
+        <p:spPr>
+          <a:xfrm>
+            <a:off x="3394976" y="2358141"/>
+            <a:ext cx="2715597" cy="1508665"/>
+          </a:xfrm>
+          <a:prstGeom prst="rect">
+            <a:avLst/>
+          </a:prstGeom>
+        </p:spPr>
+      </p:pic>
+      <p:pic>
+        <p:nvPicPr>
+          <p:cNvPr id="12" name="Graphic 11">
+            <a:extLst>
+              <a:ext uri="{FF2B5EF4-FFF2-40B4-BE49-F238E27FC236}">
+                <a16:creationId xmlns:a16="http://schemas.microsoft.com/office/drawing/2014/main" id="{68DD533F-F488-4075-A897-BDE3F326BDB1}"/>
+              </a:ext>
+            </a:extLst>
+          </p:cNvPr>
+          <p:cNvPicPr>
+            <a:picLocks noChangeAspect="1"/>
+          </p:cNvPicPr>
+          <p:nvPr/>
+        </p:nvPicPr>
+        <p:blipFill>
+          <a:blip r:embed="rId5" cstate="print">
+            <a:extLst>
+              <a:ext uri="{28A0092B-C50C-407E-A947-70E740481C1C}">
+                <a14:useLocalDpi xmlns:a14="http://schemas.microsoft.com/office/drawing/2010/main" val="0"/>
+              </a:ext>
+              <a:ext uri="{96DAC541-7B7A-43D3-8B79-37D633B846F1}">
+                <asvg:svgBlip xmlns:asvg="http://schemas.microsoft.com/office/drawing/2016/SVG/main" r:embed="rId6"/>
+              </a:ext>
+            </a:extLst>
+          </a:blip>
+          <a:stretch>
+            <a:fillRect/>
+          </a:stretch>
+        </p:blipFill>
+        <p:spPr>
+          <a:xfrm>
+            <a:off x="6187467" y="2358141"/>
+            <a:ext cx="2715598" cy="1508666"/>
+          </a:xfrm>
+          <a:prstGeom prst="rect">
+            <a:avLst/>
+          </a:prstGeom>
+        </p:spPr>
+      </p:pic>
+      <p:pic>
+        <p:nvPicPr>
+          <p:cNvPr id="14" name="Graphic 13">
+            <a:extLst>
+              <a:ext uri="{FF2B5EF4-FFF2-40B4-BE49-F238E27FC236}">
+                <a16:creationId xmlns:a16="http://schemas.microsoft.com/office/drawing/2014/main" id="{33CE741F-5D19-4324-AFAA-DD0FBB174BF3}"/>
+              </a:ext>
+            </a:extLst>
+          </p:cNvPr>
+          <p:cNvPicPr>
+            <a:picLocks noChangeAspect="1"/>
+          </p:cNvPicPr>
+          <p:nvPr/>
+        </p:nvPicPr>
+        <p:blipFill>
+          <a:blip r:embed="rId7" cstate="print">
+            <a:extLst>
+              <a:ext uri="{28A0092B-C50C-407E-A947-70E740481C1C}">
+                <a14:useLocalDpi xmlns:a14="http://schemas.microsoft.com/office/drawing/2010/main" val="0"/>
+              </a:ext>
+              <a:ext uri="{96DAC541-7B7A-43D3-8B79-37D633B846F1}">
+                <asvg:svgBlip xmlns:asvg="http://schemas.microsoft.com/office/drawing/2016/SVG/main" r:embed="rId8"/>
+              </a:ext>
+            </a:extLst>
+          </a:blip>
+          <a:stretch>
+            <a:fillRect/>
+          </a:stretch>
+        </p:blipFill>
+        <p:spPr>
+          <a:xfrm>
+            <a:off x="8979959" y="2358046"/>
+            <a:ext cx="2715768" cy="1508760"/>
+          </a:xfrm>
+          <a:prstGeom prst="rect">
+            <a:avLst/>
+          </a:prstGeom>
+        </p:spPr>
+      </p:pic>
+      <p:pic>
+        <p:nvPicPr>
+          <p:cNvPr id="16" name="Graphic 15">
+            <a:extLst>
+              <a:ext uri="{FF2B5EF4-FFF2-40B4-BE49-F238E27FC236}">
+                <a16:creationId xmlns:a16="http://schemas.microsoft.com/office/drawing/2014/main" id="{CA4A1956-CC09-434B-B364-70F8E3199610}"/>
+              </a:ext>
+            </a:extLst>
+          </p:cNvPr>
+          <p:cNvPicPr>
+            <a:picLocks noChangeAspect="1"/>
+          </p:cNvPicPr>
+          <p:nvPr/>
+        </p:nvPicPr>
+        <p:blipFill>
+          <a:blip r:embed="rId9" cstate="print">
+            <a:extLst>
+              <a:ext uri="{28A0092B-C50C-407E-A947-70E740481C1C}">
+                <a14:useLocalDpi xmlns:a14="http://schemas.microsoft.com/office/drawing/2010/main" val="0"/>
+              </a:ext>
+              <a:ext uri="{96DAC541-7B7A-43D3-8B79-37D633B846F1}">
+                <asvg:svgBlip xmlns:asvg="http://schemas.microsoft.com/office/drawing/2016/SVG/main" r:embed="rId10"/>
+              </a:ext>
+            </a:extLst>
+          </a:blip>
+          <a:stretch>
+            <a:fillRect/>
+          </a:stretch>
+        </p:blipFill>
+        <p:spPr>
+          <a:xfrm>
+            <a:off x="3394805" y="5176462"/>
+            <a:ext cx="2715768" cy="1508760"/>
+          </a:xfrm>
+          <a:prstGeom prst="rect">
+            <a:avLst/>
+          </a:prstGeom>
+        </p:spPr>
+      </p:pic>
+      <p:pic>
+        <p:nvPicPr>
+          <p:cNvPr id="18" name="Graphic 17">
+            <a:extLst>
+              <a:ext uri="{FF2B5EF4-FFF2-40B4-BE49-F238E27FC236}">
+                <a16:creationId xmlns:a16="http://schemas.microsoft.com/office/drawing/2014/main" id="{F175FDCE-135B-486C-99F7-DE8BDEE4020C}"/>
+              </a:ext>
+            </a:extLst>
+          </p:cNvPr>
+          <p:cNvPicPr>
+            <a:picLocks noChangeAspect="1"/>
+          </p:cNvPicPr>
+          <p:nvPr/>
+        </p:nvPicPr>
+        <p:blipFill>
+          <a:blip r:embed="rId11" cstate="print">
+            <a:extLst>
+              <a:ext uri="{28A0092B-C50C-407E-A947-70E740481C1C}">
+                <a14:useLocalDpi xmlns:a14="http://schemas.microsoft.com/office/drawing/2010/main" val="0"/>
+              </a:ext>
+              <a:ext uri="{96DAC541-7B7A-43D3-8B79-37D633B846F1}">
+                <asvg:svgBlip xmlns:asvg="http://schemas.microsoft.com/office/drawing/2016/SVG/main" r:embed="rId12"/>
+              </a:ext>
+            </a:extLst>
+          </a:blip>
+          <a:stretch>
+            <a:fillRect/>
+          </a:stretch>
+        </p:blipFill>
+        <p:spPr>
+          <a:xfrm>
+            <a:off x="6187297" y="5178237"/>
+            <a:ext cx="2715768" cy="1508760"/>
+          </a:xfrm>
+          <a:prstGeom prst="rect">
+            <a:avLst/>
+          </a:prstGeom>
+        </p:spPr>
+      </p:pic>
+      <p:pic>
+        <p:nvPicPr>
+          <p:cNvPr id="20" name="Graphic 19">
+            <a:extLst>
+              <a:ext uri="{FF2B5EF4-FFF2-40B4-BE49-F238E27FC236}">
+                <a16:creationId xmlns:a16="http://schemas.microsoft.com/office/drawing/2014/main" id="{259F40D0-3F8A-4B7E-9652-623E549CB442}"/>
+              </a:ext>
+            </a:extLst>
+          </p:cNvPr>
+          <p:cNvPicPr>
+            <a:picLocks noChangeAspect="1"/>
+          </p:cNvPicPr>
+          <p:nvPr/>
+        </p:nvPicPr>
+        <p:blipFill>
+          <a:blip r:embed="rId13" cstate="print">
+            <a:extLst>
+              <a:ext uri="{28A0092B-C50C-407E-A947-70E740481C1C}">
+                <a14:useLocalDpi xmlns:a14="http://schemas.microsoft.com/office/drawing/2010/main" val="0"/>
+              </a:ext>
+              <a:ext uri="{96DAC541-7B7A-43D3-8B79-37D633B846F1}">
+                <asvg:svgBlip xmlns:asvg="http://schemas.microsoft.com/office/drawing/2016/SVG/main" r:embed="rId14"/>
+              </a:ext>
+            </a:extLst>
+          </a:blip>
+          <a:stretch>
+            <a:fillRect/>
+          </a:stretch>
+        </p:blipFill>
+        <p:spPr>
+          <a:xfrm>
+            <a:off x="6187297" y="3768142"/>
+            <a:ext cx="2715768" cy="1508760"/>
+          </a:xfrm>
+          <a:prstGeom prst="rect">
+            <a:avLst/>
+          </a:prstGeom>
+        </p:spPr>
+      </p:pic>
+      <p:pic>
+        <p:nvPicPr>
+          <p:cNvPr id="22" name="Graphic 21">
+            <a:extLst>
+              <a:ext uri="{FF2B5EF4-FFF2-40B4-BE49-F238E27FC236}">
+                <a16:creationId xmlns:a16="http://schemas.microsoft.com/office/drawing/2014/main" id="{D4C283B1-E7E8-427B-9E6E-818A92BF2B3C}"/>
+              </a:ext>
+            </a:extLst>
+          </p:cNvPr>
+          <p:cNvPicPr>
+            <a:picLocks noChangeAspect="1"/>
+          </p:cNvPicPr>
+          <p:nvPr/>
+        </p:nvPicPr>
+        <p:blipFill>
+          <a:blip r:embed="rId15" cstate="print">
+            <a:extLst>
+              <a:ext uri="{28A0092B-C50C-407E-A947-70E740481C1C}">
+                <a14:useLocalDpi xmlns:a14="http://schemas.microsoft.com/office/drawing/2010/main" val="0"/>
+              </a:ext>
+              <a:ext uri="{96DAC541-7B7A-43D3-8B79-37D633B846F1}">
+                <asvg:svgBlip xmlns:asvg="http://schemas.microsoft.com/office/drawing/2016/SVG/main" r:embed="rId16"/>
+              </a:ext>
+            </a:extLst>
+          </a:blip>
+          <a:stretch>
+            <a:fillRect/>
+          </a:stretch>
+        </p:blipFill>
+        <p:spPr>
+          <a:xfrm>
+            <a:off x="8979789" y="3768142"/>
+            <a:ext cx="2715768" cy="1508760"/>
+          </a:xfrm>
+          <a:prstGeom prst="rect">
+            <a:avLst/>
+          </a:prstGeom>
+        </p:spPr>
+      </p:pic>
+      <p:sp>
+        <p:nvSpPr>
+          <p:cNvPr id="29" name="TextBox 28">
+            <a:extLst>
+              <a:ext uri="{FF2B5EF4-FFF2-40B4-BE49-F238E27FC236}">
+                <a16:creationId xmlns:a16="http://schemas.microsoft.com/office/drawing/2014/main" id="{996930FA-D289-40D0-8194-E99C7EE74483}"/>
+              </a:ext>
+            </a:extLst>
+          </p:cNvPr>
+          <p:cNvSpPr txBox="1"/>
+          <p:nvPr/>
+        </p:nvSpPr>
+        <p:spPr>
+          <a:xfrm>
+            <a:off x="9288731" y="5599351"/>
+            <a:ext cx="2286000" cy="646331"/>
+          </a:xfrm>
+          <a:prstGeom prst="rect">
+            <a:avLst/>
+          </a:prstGeom>
+          <a:noFill/>
+        </p:spPr>
+        <p:txBody>
+          <a:bodyPr wrap="square" rtlCol="0">
+            <a:spAutoFit/>
+          </a:bodyPr>
+          <a:lstStyle/>
+          <a:p>
+            <a:r>
+              <a:rPr lang="en-US" dirty="0"/>
+              <a:t>Not tested due to continuous regression</a:t>
+            </a:r>
+          </a:p>
+        </p:txBody>
+      </p:sp>
+      <p:sp>
+        <p:nvSpPr>
+          <p:cNvPr id="32" name="TextBox 31">
+            <a:extLst>
+              <a:ext uri="{FF2B5EF4-FFF2-40B4-BE49-F238E27FC236}">
+                <a16:creationId xmlns:a16="http://schemas.microsoft.com/office/drawing/2014/main" id="{71D8B828-CFC2-4E7E-8E9F-C7F81CC7C391}"/>
+              </a:ext>
+            </a:extLst>
+          </p:cNvPr>
+          <p:cNvSpPr txBox="1"/>
+          <p:nvPr/>
+        </p:nvSpPr>
+        <p:spPr>
+          <a:xfrm>
+            <a:off x="3712326" y="4189350"/>
+            <a:ext cx="2286000" cy="646331"/>
+          </a:xfrm>
+          <a:prstGeom prst="rect">
+            <a:avLst/>
+          </a:prstGeom>
+          <a:noFill/>
+        </p:spPr>
+        <p:txBody>
+          <a:bodyPr wrap="square" rtlCol="0">
+            <a:spAutoFit/>
+          </a:bodyPr>
+          <a:lstStyle/>
+          <a:p>
+            <a:r>
+              <a:rPr lang="en-US" dirty="0"/>
+              <a:t>Nothing to fix; </a:t>
+            </a:r>
+            <a:br>
+              <a:rPr lang="en-US" dirty="0"/>
+            </a:br>
+            <a:r>
+              <a:rPr lang="en-US" dirty="0"/>
+              <a:t>all green</a:t>
+            </a:r>
+          </a:p>
+        </p:txBody>
+      </p:sp>
+      <p:sp>
+        <p:nvSpPr>
+          <p:cNvPr id="33" name="TextBox 32">
+            <a:extLst>
+              <a:ext uri="{FF2B5EF4-FFF2-40B4-BE49-F238E27FC236}">
+                <a16:creationId xmlns:a16="http://schemas.microsoft.com/office/drawing/2014/main" id="{B4254EBD-80CA-4510-B0CC-B45047A5C6A3}"/>
+              </a:ext>
+            </a:extLst>
+          </p:cNvPr>
+          <p:cNvSpPr txBox="1"/>
+          <p:nvPr/>
+        </p:nvSpPr>
+        <p:spPr>
+          <a:xfrm>
+            <a:off x="3922206" y="2074913"/>
+            <a:ext cx="1866239" cy="292388"/>
+          </a:xfrm>
+          <a:prstGeom prst="rect">
+            <a:avLst/>
+          </a:prstGeom>
+          <a:noFill/>
+        </p:spPr>
+        <p:txBody>
+          <a:bodyPr wrap="square">
+            <a:spAutoFit/>
+          </a:bodyPr>
+          <a:lstStyle/>
+          <a:p>
+            <a:pPr algn="ctr"/>
+            <a:r>
+              <a:rPr lang="en-US" sz="1300" dirty="0">
+                <a:solidFill>
+                  <a:srgbClr val="333333"/>
+                </a:solidFill>
+                <a:latin typeface="HSE Sans" panose="02000000000000000000"/>
+                <a:ea typeface="Arial" pitchFamily="34" charset="-122"/>
+                <a:cs typeface="Arial" pitchFamily="34" charset="-120"/>
+              </a:rPr>
+              <a:t>5 tasks</a:t>
+            </a:r>
+            <a:endParaRPr lang="en-US" sz="1400" dirty="0">
+              <a:latin typeface="HSE Sans" panose="02000000000000000000"/>
+            </a:endParaRPr>
+          </a:p>
+        </p:txBody>
+      </p:sp>
+      <p:sp>
+        <p:nvSpPr>
+          <p:cNvPr id="34" name="TextBox 33">
+            <a:extLst>
+              <a:ext uri="{FF2B5EF4-FFF2-40B4-BE49-F238E27FC236}">
+                <a16:creationId xmlns:a16="http://schemas.microsoft.com/office/drawing/2014/main" id="{34E7252D-35AF-48CA-B622-596CFEF13FDC}"/>
+              </a:ext>
+            </a:extLst>
+          </p:cNvPr>
+          <p:cNvSpPr txBox="1"/>
+          <p:nvPr/>
+        </p:nvSpPr>
+        <p:spPr>
+          <a:xfrm>
+            <a:off x="6730720" y="2074913"/>
+            <a:ext cx="1866239" cy="292388"/>
+          </a:xfrm>
+          <a:prstGeom prst="rect">
+            <a:avLst/>
+          </a:prstGeom>
+          <a:noFill/>
+        </p:spPr>
+        <p:txBody>
+          <a:bodyPr wrap="square">
+            <a:spAutoFit/>
+          </a:bodyPr>
+          <a:lstStyle/>
+          <a:p>
+            <a:pPr algn="ctr"/>
+            <a:r>
+              <a:rPr lang="en-US" sz="1300" dirty="0">
+                <a:solidFill>
+                  <a:srgbClr val="333333"/>
+                </a:solidFill>
+                <a:latin typeface="HSE Sans" panose="02000000000000000000"/>
+                <a:ea typeface="Arial" pitchFamily="34" charset="-122"/>
+                <a:cs typeface="Arial" pitchFamily="34" charset="-120"/>
+              </a:rPr>
+              <a:t>10 tasks</a:t>
+            </a:r>
+            <a:endParaRPr lang="en-US" sz="1400" dirty="0">
+              <a:latin typeface="HSE Sans" panose="02000000000000000000"/>
+            </a:endParaRPr>
+          </a:p>
+        </p:txBody>
+      </p:sp>
+      <p:sp>
+        <p:nvSpPr>
+          <p:cNvPr id="35" name="TextBox 34">
+            <a:extLst>
+              <a:ext uri="{FF2B5EF4-FFF2-40B4-BE49-F238E27FC236}">
+                <a16:creationId xmlns:a16="http://schemas.microsoft.com/office/drawing/2014/main" id="{93A58E4D-1969-44F9-A006-EFEFCEDADBBA}"/>
+              </a:ext>
+            </a:extLst>
+          </p:cNvPr>
+          <p:cNvSpPr txBox="1"/>
+          <p:nvPr/>
+        </p:nvSpPr>
+        <p:spPr>
+          <a:xfrm>
+            <a:off x="9498611" y="2074913"/>
+            <a:ext cx="1866239" cy="292388"/>
+          </a:xfrm>
+          <a:prstGeom prst="rect">
+            <a:avLst/>
+          </a:prstGeom>
+          <a:noFill/>
+        </p:spPr>
+        <p:txBody>
+          <a:bodyPr wrap="square">
+            <a:spAutoFit/>
+          </a:bodyPr>
+          <a:lstStyle/>
+          <a:p>
+            <a:pPr algn="ctr"/>
+            <a:r>
+              <a:rPr lang="en-US" sz="1300" dirty="0">
+                <a:solidFill>
+                  <a:srgbClr val="333333"/>
+                </a:solidFill>
+                <a:latin typeface="HSE Sans" panose="02000000000000000000"/>
+                <a:ea typeface="Arial" pitchFamily="34" charset="-122"/>
+                <a:cs typeface="Arial" pitchFamily="34" charset="-120"/>
+              </a:rPr>
+              <a:t>20 tasks</a:t>
+            </a:r>
+            <a:endParaRPr lang="en-US" sz="1400" dirty="0">
+              <a:latin typeface="HSE Sans" panose="02000000000000000000"/>
+            </a:endParaRPr>
+          </a:p>
+        </p:txBody>
+      </p:sp>
+      <p:sp>
+        <p:nvSpPr>
+          <p:cNvPr id="36" name="TextBox 35">
+            <a:extLst>
+              <a:ext uri="{FF2B5EF4-FFF2-40B4-BE49-F238E27FC236}">
+                <a16:creationId xmlns:a16="http://schemas.microsoft.com/office/drawing/2014/main" id="{E62990E4-409C-4AF2-BCF4-3759A2A333EB}"/>
+              </a:ext>
+            </a:extLst>
+          </p:cNvPr>
+          <p:cNvSpPr txBox="1"/>
+          <p:nvPr/>
+        </p:nvSpPr>
+        <p:spPr>
+          <a:xfrm rot="16200000">
+            <a:off x="2345879" y="2940066"/>
+            <a:ext cx="1866239" cy="292388"/>
+          </a:xfrm>
+          <a:prstGeom prst="rect">
+            <a:avLst/>
+          </a:prstGeom>
+          <a:noFill/>
+        </p:spPr>
+        <p:txBody>
+          <a:bodyPr wrap="square">
+            <a:spAutoFit/>
+          </a:bodyPr>
+          <a:lstStyle/>
+          <a:p>
+            <a:pPr algn="ctr"/>
+            <a:r>
+              <a:rPr lang="en-US" sz="1300" dirty="0" err="1">
+                <a:solidFill>
+                  <a:srgbClr val="333333"/>
+                </a:solidFill>
+                <a:latin typeface="HSE Sans" panose="02000000000000000000"/>
+                <a:ea typeface="Arial" pitchFamily="34" charset="-122"/>
+                <a:cs typeface="Arial" pitchFamily="34" charset="-120"/>
+              </a:rPr>
+              <a:t>Qwen</a:t>
+            </a:r>
+            <a:r>
+              <a:rPr lang="en-US" sz="1300" dirty="0">
+                <a:solidFill>
+                  <a:srgbClr val="333333"/>
+                </a:solidFill>
+                <a:latin typeface="HSE Sans" panose="02000000000000000000"/>
+                <a:ea typeface="Arial" pitchFamily="34" charset="-122"/>
+                <a:cs typeface="Arial" pitchFamily="34" charset="-120"/>
+              </a:rPr>
+              <a:t> 3</a:t>
+            </a:r>
+            <a:endParaRPr lang="en-US" sz="1400" dirty="0">
+              <a:latin typeface="HSE Sans" panose="02000000000000000000"/>
+            </a:endParaRPr>
+          </a:p>
+        </p:txBody>
+      </p:sp>
+      <p:sp>
+        <p:nvSpPr>
+          <p:cNvPr id="37" name="TextBox 36">
+            <a:extLst>
+              <a:ext uri="{FF2B5EF4-FFF2-40B4-BE49-F238E27FC236}">
+                <a16:creationId xmlns:a16="http://schemas.microsoft.com/office/drawing/2014/main" id="{1F66FFBF-3C7B-48BB-B38B-AB584F32DD93}"/>
+              </a:ext>
+            </a:extLst>
+          </p:cNvPr>
+          <p:cNvSpPr txBox="1"/>
+          <p:nvPr/>
+        </p:nvSpPr>
+        <p:spPr>
+          <a:xfrm rot="16200000">
+            <a:off x="2340653" y="4386307"/>
+            <a:ext cx="1866239" cy="292388"/>
+          </a:xfrm>
+          <a:prstGeom prst="rect">
+            <a:avLst/>
+          </a:prstGeom>
+          <a:noFill/>
+        </p:spPr>
+        <p:txBody>
+          <a:bodyPr wrap="square">
+            <a:spAutoFit/>
+          </a:bodyPr>
+          <a:lstStyle/>
+          <a:p>
+            <a:pPr algn="ctr"/>
+            <a:r>
+              <a:rPr lang="en-US" sz="1300" dirty="0" err="1">
+                <a:solidFill>
+                  <a:srgbClr val="333333"/>
+                </a:solidFill>
+                <a:latin typeface="HSE Sans" panose="02000000000000000000"/>
+                <a:ea typeface="Arial" pitchFamily="34" charset="-122"/>
+                <a:cs typeface="Arial" pitchFamily="34" charset="-120"/>
+              </a:rPr>
+              <a:t>Qwen</a:t>
+            </a:r>
+            <a:r>
+              <a:rPr lang="en-US" sz="1300" dirty="0">
+                <a:solidFill>
+                  <a:srgbClr val="333333"/>
+                </a:solidFill>
+                <a:latin typeface="HSE Sans" panose="02000000000000000000"/>
+                <a:ea typeface="Arial" pitchFamily="34" charset="-122"/>
+                <a:cs typeface="Arial" pitchFamily="34" charset="-120"/>
+              </a:rPr>
+              <a:t> 3.5</a:t>
+            </a:r>
+            <a:endParaRPr lang="en-US" sz="1400" dirty="0">
+              <a:latin typeface="HSE Sans" panose="02000000000000000000"/>
+            </a:endParaRPr>
+          </a:p>
+        </p:txBody>
+      </p:sp>
+      <p:sp>
+        <p:nvSpPr>
+          <p:cNvPr id="38" name="TextBox 37">
+            <a:extLst>
+              <a:ext uri="{FF2B5EF4-FFF2-40B4-BE49-F238E27FC236}">
+                <a16:creationId xmlns:a16="http://schemas.microsoft.com/office/drawing/2014/main" id="{0A40C63E-EEF1-4B91-945F-7912B60681A2}"/>
+              </a:ext>
+            </a:extLst>
+          </p:cNvPr>
+          <p:cNvSpPr txBox="1"/>
+          <p:nvPr/>
+        </p:nvSpPr>
+        <p:spPr>
+          <a:xfrm rot="16200000">
+            <a:off x="2358767" y="5762716"/>
+            <a:ext cx="1866239" cy="292388"/>
+          </a:xfrm>
+          <a:prstGeom prst="rect">
+            <a:avLst/>
+          </a:prstGeom>
+          <a:noFill/>
+        </p:spPr>
+        <p:txBody>
+          <a:bodyPr wrap="square">
+            <a:spAutoFit/>
+          </a:bodyPr>
+          <a:lstStyle/>
+          <a:p>
+            <a:pPr algn="ctr"/>
+            <a:r>
+              <a:rPr lang="en-US" sz="1300" dirty="0">
+                <a:solidFill>
+                  <a:srgbClr val="333333"/>
+                </a:solidFill>
+                <a:latin typeface="HSE Sans" panose="02000000000000000000"/>
+                <a:ea typeface="Arial" pitchFamily="34" charset="-122"/>
+                <a:cs typeface="Arial" pitchFamily="34" charset="-120"/>
+              </a:rPr>
+              <a:t>GLM 4.7</a:t>
+            </a:r>
+            <a:endParaRPr lang="en-US" sz="1400" dirty="0">
+              <a:latin typeface="HSE Sans" panose="02000000000000000000"/>
+            </a:endParaRPr>
+          </a:p>
+        </p:txBody>
+      </p:sp>
+      <p:sp>
+        <p:nvSpPr>
+          <p:cNvPr id="39" name="TextBox 38">
+            <a:extLst>
+              <a:ext uri="{FF2B5EF4-FFF2-40B4-BE49-F238E27FC236}">
+                <a16:creationId xmlns:a16="http://schemas.microsoft.com/office/drawing/2014/main" id="{FF6CD6AE-E372-495E-A90C-91A8875C7BA8}"/>
+              </a:ext>
+            </a:extLst>
+          </p:cNvPr>
+          <p:cNvSpPr txBox="1"/>
+          <p:nvPr/>
+        </p:nvSpPr>
+        <p:spPr>
+          <a:xfrm>
+            <a:off x="288946" y="2575221"/>
+            <a:ext cx="2649661" cy="3600986"/>
+          </a:xfrm>
+          <a:prstGeom prst="rect">
+            <a:avLst/>
+          </a:prstGeom>
+          <a:noFill/>
+        </p:spPr>
+        <p:txBody>
+          <a:bodyPr wrap="square" rtlCol="0">
+            <a:spAutoFit/>
+          </a:bodyPr>
+          <a:lstStyle/>
+          <a:p>
+            <a:pPr marL="342900" indent="-342900">
+              <a:spcAft>
+                <a:spcPts val="1200"/>
+              </a:spcAft>
+              <a:buAutoNum type="arabicPeriod"/>
+            </a:pPr>
+            <a:r>
+              <a:rPr lang="en-US" sz="1600" dirty="0">
+                <a:latin typeface="HSE Sans" panose="02000000000000000000"/>
+              </a:rPr>
+              <a:t>Some models just can’t get any benefits from prompt tuning – e.g. GLM 4.7</a:t>
+            </a:r>
+          </a:p>
+          <a:p>
+            <a:pPr marL="342900" indent="-342900">
+              <a:spcAft>
+                <a:spcPts val="1200"/>
+              </a:spcAft>
+              <a:buAutoNum type="arabicPeriod"/>
+            </a:pPr>
+            <a:r>
+              <a:rPr lang="en-US" sz="1600" dirty="0">
+                <a:latin typeface="HSE Sans" panose="02000000000000000000"/>
+              </a:rPr>
+              <a:t>All models poorly retain of pass rate improvement - sweep 1 has 100% fix rate, only half persist to sweep 3</a:t>
+            </a:r>
+          </a:p>
+          <a:p>
+            <a:pPr marL="342900" indent="-342900">
+              <a:spcAft>
+                <a:spcPts val="1200"/>
+              </a:spcAft>
+              <a:buAutoNum type="arabicPeriod"/>
+            </a:pPr>
+            <a:r>
+              <a:rPr lang="en-US" sz="1600" dirty="0">
+                <a:latin typeface="HSE Sans" panose="02000000000000000000"/>
+              </a:rPr>
+              <a:t>The stronger the model, the more it retains -&gt; </a:t>
+            </a:r>
+            <a:r>
+              <a:rPr lang="en-US" sz="1600" dirty="0" err="1">
+                <a:latin typeface="HSE Sans" panose="02000000000000000000"/>
+              </a:rPr>
+              <a:t>Qwen</a:t>
+            </a:r>
+            <a:r>
+              <a:rPr lang="en-US" sz="1600" dirty="0">
+                <a:latin typeface="HSE Sans" panose="02000000000000000000"/>
+              </a:rPr>
+              <a:t> 3.5 is superior to </a:t>
+            </a:r>
+            <a:r>
+              <a:rPr lang="en-US" sz="1600" dirty="0" err="1">
+                <a:latin typeface="HSE Sans" panose="02000000000000000000"/>
+              </a:rPr>
+              <a:t>Qwen</a:t>
+            </a:r>
+            <a:r>
+              <a:rPr lang="en-US" sz="1600" dirty="0">
+                <a:latin typeface="HSE Sans" panose="02000000000000000000"/>
+              </a:rPr>
+              <a:t> 3</a:t>
+            </a:r>
+          </a:p>
+        </p:txBody>
+      </p:sp>
+    </p:spTree>
+    <p:extLst>
+      <p:ext uri="{BB962C8B-B14F-4D97-AF65-F5344CB8AC3E}">
+        <p14:creationId xmlns:p14="http://schemas.microsoft.com/office/powerpoint/2010/main" val="1464276727"/>
+      </p:ext>
+    </p:extLst>
+  </p:cSld>
+  <p:clrMapOvr>
+    <a:masterClrMapping/>
+  </p:clrMapOvr>
+</p:sld>
+</file>
+
+<file path=ppt/slides/slide14.xml><?xml version="1.0" encoding="utf-8"?>
+<p:sld xmlns:a="http://schemas.openxmlformats.org/drawingml/2006/main" xmlns:r="http://schemas.openxmlformats.org/officeDocument/2006/relationships" xmlns:p="http://schemas.openxmlformats.org/presentationml/2006/main">
+  <p:cSld>
+    <p:spTree>
+      <p:nvGrpSpPr>
+        <p:cNvPr id="1" name=""/>
+        <p:cNvGrpSpPr/>
+        <p:nvPr/>
+      </p:nvGrpSpPr>
+      <p:grpSpPr>
+        <a:xfrm>
+          <a:off x="0" y="0"/>
+          <a:ext cx="0" cy="0"/>
+          <a:chOff x="0" y="0"/>
+          <a:chExt cx="0" cy="0"/>
+        </a:xfrm>
+      </p:grpSpPr>
+      <p:cxnSp>
+        <p:nvCxnSpPr>
+          <p:cNvPr id="23" name="Straight Connector 19">
+            <a:extLst>
+              <a:ext uri="{FF2B5EF4-FFF2-40B4-BE49-F238E27FC236}">
+                <a16:creationId xmlns:a16="http://schemas.microsoft.com/office/drawing/2014/main" id="{F208E74D-9D70-3B41-9778-E6E8B05CDF2D}"/>
+              </a:ext>
+            </a:extLst>
+          </p:cNvPr>
+          <p:cNvCxnSpPr>
+            <a:cxnSpLocks/>
+          </p:cNvCxnSpPr>
+          <p:nvPr/>
+        </p:nvCxnSpPr>
+        <p:spPr>
+          <a:xfrm>
+            <a:off x="3298686" y="464363"/>
+            <a:ext cx="0" cy="586260"/>
+          </a:xfrm>
+          <a:prstGeom prst="line">
+            <a:avLst/>
+          </a:prstGeom>
+          <a:ln w="12700">
+            <a:solidFill>
+              <a:srgbClr val="102D69"/>
+            </a:solidFill>
+          </a:ln>
+        </p:spPr>
+        <p:style>
+          <a:lnRef idx="1">
+            <a:schemeClr val="accent1"/>
+          </a:lnRef>
+          <a:fillRef idx="0">
+            <a:schemeClr val="accent1"/>
+          </a:fillRef>
+          <a:effectRef idx="0">
+            <a:schemeClr val="accent1"/>
+          </a:effectRef>
+          <a:fontRef idx="minor">
+            <a:schemeClr val="tx1"/>
+          </a:fontRef>
+        </p:style>
+      </p:cxnSp>
+      <p:cxnSp>
+        <p:nvCxnSpPr>
+          <p:cNvPr id="24" name="Straight Connector 21">
+            <a:extLst>
+              <a:ext uri="{FF2B5EF4-FFF2-40B4-BE49-F238E27FC236}">
+                <a16:creationId xmlns:a16="http://schemas.microsoft.com/office/drawing/2014/main" id="{89B3484F-8C76-694C-8CD1-F1F8262BD87E}"/>
+              </a:ext>
+            </a:extLst>
+          </p:cNvPr>
+          <p:cNvCxnSpPr>
+            <a:cxnSpLocks/>
+          </p:cNvCxnSpPr>
+          <p:nvPr/>
+        </p:nvCxnSpPr>
+        <p:spPr>
+          <a:xfrm>
+            <a:off x="6099416" y="464363"/>
+            <a:ext cx="0" cy="586260"/>
+          </a:xfrm>
+          <a:prstGeom prst="line">
+            <a:avLst/>
+          </a:prstGeom>
+          <a:ln w="12700">
+            <a:solidFill>
+              <a:srgbClr val="102D69"/>
+            </a:solidFill>
+          </a:ln>
+        </p:spPr>
+        <p:style>
+          <a:lnRef idx="1">
+            <a:schemeClr val="accent1"/>
+          </a:lnRef>
+          <a:fillRef idx="0">
+            <a:schemeClr val="accent1"/>
+          </a:fillRef>
+          <a:effectRef idx="0">
+            <a:schemeClr val="accent1"/>
+          </a:effectRef>
+          <a:fontRef idx="minor">
+            <a:schemeClr val="tx1"/>
+          </a:fontRef>
+        </p:style>
+      </p:cxnSp>
+      <p:cxnSp>
+        <p:nvCxnSpPr>
+          <p:cNvPr id="25" name="Straight Connector 25">
+            <a:extLst>
+              <a:ext uri="{FF2B5EF4-FFF2-40B4-BE49-F238E27FC236}">
+                <a16:creationId xmlns:a16="http://schemas.microsoft.com/office/drawing/2014/main" id="{B571D10A-0DDC-9847-BD1B-712A3C9F3055}"/>
+              </a:ext>
+            </a:extLst>
+          </p:cNvPr>
+          <p:cNvCxnSpPr>
+            <a:cxnSpLocks/>
+          </p:cNvCxnSpPr>
+          <p:nvPr/>
+        </p:nvCxnSpPr>
+        <p:spPr>
+          <a:xfrm>
+            <a:off x="10277081" y="464363"/>
+            <a:ext cx="0" cy="586260"/>
+          </a:xfrm>
+          <a:prstGeom prst="line">
+            <a:avLst/>
+          </a:prstGeom>
+          <a:ln w="12700">
+            <a:solidFill>
+              <a:srgbClr val="102D69"/>
+            </a:solidFill>
+          </a:ln>
+        </p:spPr>
+        <p:style>
+          <a:lnRef idx="1">
+            <a:schemeClr val="accent1"/>
+          </a:lnRef>
+          <a:fillRef idx="0">
+            <a:schemeClr val="accent1"/>
+          </a:fillRef>
+          <a:effectRef idx="0">
+            <a:schemeClr val="accent1"/>
+          </a:effectRef>
+          <a:fontRef idx="minor">
+            <a:schemeClr val="tx1"/>
+          </a:fontRef>
+        </p:style>
+      </p:cxnSp>
+      <p:sp>
+        <p:nvSpPr>
+          <p:cNvPr id="26" name="TextBox 25">
+            <a:extLst>
+              <a:ext uri="{FF2B5EF4-FFF2-40B4-BE49-F238E27FC236}">
+                <a16:creationId xmlns:a16="http://schemas.microsoft.com/office/drawing/2014/main" id="{8E64125C-F6DE-1F4A-A554-9F1C35EAFB8C}"/>
+              </a:ext>
+            </a:extLst>
+          </p:cNvPr>
+          <p:cNvSpPr txBox="1"/>
+          <p:nvPr/>
+        </p:nvSpPr>
+        <p:spPr>
+          <a:xfrm>
+            <a:off x="10337843" y="497315"/>
+            <a:ext cx="671977" cy="400110"/>
+          </a:xfrm>
+          <a:prstGeom prst="rect">
+            <a:avLst/>
+          </a:prstGeom>
+          <a:noFill/>
+        </p:spPr>
+        <p:txBody>
+          <a:bodyPr wrap="square" rtlCol="0">
+            <a:spAutoFit/>
+          </a:bodyPr>
+          <a:lstStyle/>
+          <a:p>
+            <a:r>
+              <a:rPr lang="en-US" sz="2000" dirty="0">
+                <a:solidFill>
+                  <a:srgbClr val="102D69"/>
+                </a:solidFill>
+                <a:latin typeface="HSE Sans" panose="02000000000000000000" pitchFamily="2" charset="0"/>
+              </a:rPr>
               <a:t>13</a:t>
             </a:r>
             <a:endParaRPr lang="ru-RU" sz="2000" dirty="0">
@@ -13639,7 +14350,7 @@
         <p:spPr>
           <a:xfrm>
             <a:off x="3365627" y="497315"/>
-            <a:ext cx="2346745" cy="400110"/>
+            <a:ext cx="2346745" cy="553998"/>
           </a:xfrm>
           <a:prstGeom prst="rect">
             <a:avLst/>
@@ -13656,7 +14367,18 @@
               <a:rPr lang="en-US" sz="1000" dirty="0">
                 <a:latin typeface="HSE Sans" panose="02000000000000000000" pitchFamily="2" charset="0"/>
               </a:rPr>
-              <a:t>Self-Evolving LLM Agents via Reflective Prompt and Tool-Schema Patching</a:t>
+              <a:t>Automatically Evolving Multi-Turn</a:t>
+            </a:r>
+            <a:br>
+              <a:rPr lang="en-US" sz="1000" dirty="0">
+                <a:latin typeface="HSE Sans" panose="02000000000000000000" pitchFamily="2" charset="0"/>
+              </a:rPr>
+            </a:br>
+            <a:r>
+              <a:rPr lang="en-US" sz="1000" dirty="0">
+                <a:latin typeface="HSE Sans" panose="02000000000000000000" pitchFamily="2" charset="0"/>
+              </a:rPr>
+              <a:t>Customer Service AI Agents via Prompt-Level Distillation</a:t>
             </a:r>
           </a:p>
         </p:txBody>
@@ -15160,7 +15882,7 @@
 </p:sld>
 </file>
 
-<file path=ppt/slides/slide14.xml><?xml version="1.0" encoding="utf-8"?>
+<file path=ppt/slides/slide15.xml><?xml version="1.0" encoding="utf-8"?>
 <p:sld xmlns:a="http://schemas.openxmlformats.org/drawingml/2006/main" xmlns:r="http://schemas.openxmlformats.org/officeDocument/2006/relationships" xmlns:p="http://schemas.openxmlformats.org/presentationml/2006/main">
   <p:cSld>
     <p:spTree>
@@ -15410,7 +16132,7 @@
         <p:spPr>
           <a:xfrm>
             <a:off x="3365627" y="497315"/>
-            <a:ext cx="2346745" cy="400110"/>
+            <a:ext cx="2346745" cy="553998"/>
           </a:xfrm>
           <a:prstGeom prst="rect">
             <a:avLst/>
@@ -15427,7 +16149,18 @@
               <a:rPr lang="en-US" sz="1000" dirty="0">
                 <a:latin typeface="HSE Sans" panose="02000000000000000000" pitchFamily="2" charset="0"/>
               </a:rPr>
-              <a:t>Self-Evolving LLM Agents via Reflective Prompt and Tool-Schema Patching</a:t>
+              <a:t>Automatically Evolving Multi-Turn</a:t>
+            </a:r>
+            <a:br>
+              <a:rPr lang="en-US" sz="1000" dirty="0">
+                <a:latin typeface="HSE Sans" panose="02000000000000000000" pitchFamily="2" charset="0"/>
+              </a:rPr>
+            </a:br>
+            <a:r>
+              <a:rPr lang="en-US" sz="1000" dirty="0">
+                <a:latin typeface="HSE Sans" panose="02000000000000000000" pitchFamily="2" charset="0"/>
+              </a:rPr>
+              <a:t>Customer Service AI Agents via Prompt-Level Distillation</a:t>
             </a:r>
           </a:p>
         </p:txBody>
@@ -16484,7 +17217,7 @@
 </p:sld>
 </file>
 
-<file path=ppt/slides/slide15.xml><?xml version="1.0" encoding="utf-8"?>
+<file path=ppt/slides/slide16.xml><?xml version="1.0" encoding="utf-8"?>
 <p:sld xmlns:a="http://schemas.openxmlformats.org/drawingml/2006/main" xmlns:r="http://schemas.openxmlformats.org/officeDocument/2006/relationships" xmlns:p="http://schemas.openxmlformats.org/presentationml/2006/main">
   <p:cSld>
     <p:spTree>
@@ -16734,7 +17467,7 @@
         <p:spPr>
           <a:xfrm>
             <a:off x="3365627" y="497315"/>
-            <a:ext cx="2346745" cy="400110"/>
+            <a:ext cx="2346745" cy="553998"/>
           </a:xfrm>
           <a:prstGeom prst="rect">
             <a:avLst/>
@@ -16751,7 +17484,18 @@
               <a:rPr lang="en-US" sz="1000" dirty="0">
                 <a:latin typeface="HSE Sans" panose="02000000000000000000" pitchFamily="2" charset="0"/>
               </a:rPr>
-              <a:t>Self-Evolving LLM Agents via Reflective Prompt and Tool-Schema Patching</a:t>
+              <a:t>Automatically Evolving Multi-Turn</a:t>
+            </a:r>
+            <a:br>
+              <a:rPr lang="en-US" sz="1000" dirty="0">
+                <a:latin typeface="HSE Sans" panose="02000000000000000000" pitchFamily="2" charset="0"/>
+              </a:rPr>
+            </a:br>
+            <a:r>
+              <a:rPr lang="en-US" sz="1000" dirty="0">
+                <a:latin typeface="HSE Sans" panose="02000000000000000000" pitchFamily="2" charset="0"/>
+              </a:rPr>
+              <a:t>Customer Service AI Agents via Prompt-Level Distillation</a:t>
             </a:r>
           </a:p>
         </p:txBody>
@@ -17583,7 +18327,7 @@
         <p:spPr>
           <a:xfrm>
             <a:off x="3365627" y="497315"/>
-            <a:ext cx="2346745" cy="400110"/>
+            <a:ext cx="2346745" cy="553998"/>
           </a:xfrm>
           <a:prstGeom prst="rect">
             <a:avLst/>
@@ -17600,7 +18344,18 @@
               <a:rPr lang="en-US" sz="1000" dirty="0">
                 <a:latin typeface="HSE Sans" panose="02000000000000000000" pitchFamily="2" charset="0"/>
               </a:rPr>
-              <a:t>Self-Evolving LLM Agents via Reflective Prompt and Tool-Schema Patching</a:t>
+              <a:t>Automatically Evolving Multi-Turn</a:t>
+            </a:r>
+            <a:br>
+              <a:rPr lang="en-US" sz="1000" dirty="0">
+                <a:latin typeface="HSE Sans" panose="02000000000000000000" pitchFamily="2" charset="0"/>
+              </a:rPr>
+            </a:br>
+            <a:r>
+              <a:rPr lang="en-US" sz="1000" dirty="0">
+                <a:latin typeface="HSE Sans" panose="02000000000000000000" pitchFamily="2" charset="0"/>
+              </a:rPr>
+              <a:t>Customer Service AI Agents via Prompt-Level Distillation</a:t>
             </a:r>
           </a:p>
         </p:txBody>
@@ -18783,7 +19538,7 @@
         <p:spPr>
           <a:xfrm>
             <a:off x="3365627" y="497315"/>
-            <a:ext cx="2346745" cy="400110"/>
+            <a:ext cx="2346745" cy="553998"/>
           </a:xfrm>
           <a:prstGeom prst="rect">
             <a:avLst/>
@@ -18800,7 +19555,18 @@
               <a:rPr lang="en-US" sz="1000" dirty="0">
                 <a:latin typeface="HSE Sans" panose="02000000000000000000" pitchFamily="2" charset="0"/>
               </a:rPr>
-              <a:t>Self-Evolving LLM Agents via Reflective Prompt and Tool-Schema Patching</a:t>
+              <a:t>Automatically Evolving Multi-Turn</a:t>
+            </a:r>
+            <a:br>
+              <a:rPr lang="en-US" sz="1000" dirty="0">
+                <a:latin typeface="HSE Sans" panose="02000000000000000000" pitchFamily="2" charset="0"/>
+              </a:rPr>
+            </a:br>
+            <a:r>
+              <a:rPr lang="en-US" sz="1000" dirty="0">
+                <a:latin typeface="HSE Sans" panose="02000000000000000000" pitchFamily="2" charset="0"/>
+              </a:rPr>
+              <a:t>Customer Service AI Agents via Prompt-Level Distillation</a:t>
             </a:r>
           </a:p>
         </p:txBody>
@@ -19456,7 +20222,7 @@
         <p:spPr>
           <a:xfrm>
             <a:off x="3365627" y="497315"/>
-            <a:ext cx="2346745" cy="400110"/>
+            <a:ext cx="2346745" cy="553998"/>
           </a:xfrm>
           <a:prstGeom prst="rect">
             <a:avLst/>
@@ -19473,7 +20239,18 @@
               <a:rPr lang="en-US" sz="1000" dirty="0">
                 <a:latin typeface="HSE Sans" panose="02000000000000000000" pitchFamily="2" charset="0"/>
               </a:rPr>
-              <a:t>Self-Evolving LLM Agents via Reflective Prompt and Tool-Schema Patching</a:t>
+              <a:t>Automatically Evolving Multi-Turn</a:t>
+            </a:r>
+            <a:br>
+              <a:rPr lang="en-US" sz="1000" dirty="0">
+                <a:latin typeface="HSE Sans" panose="02000000000000000000" pitchFamily="2" charset="0"/>
+              </a:rPr>
+            </a:br>
+            <a:r>
+              <a:rPr lang="en-US" sz="1000" dirty="0">
+                <a:latin typeface="HSE Sans" panose="02000000000000000000" pitchFamily="2" charset="0"/>
+              </a:rPr>
+              <a:t>Customer Service AI Agents via Prompt-Level Distillation</a:t>
             </a:r>
           </a:p>
         </p:txBody>
@@ -21229,7 +22006,7 @@
         <p:spPr>
           <a:xfrm>
             <a:off x="3365627" y="497315"/>
-            <a:ext cx="2346745" cy="400110"/>
+            <a:ext cx="2346745" cy="553998"/>
           </a:xfrm>
           <a:prstGeom prst="rect">
             <a:avLst/>
@@ -21246,7 +22023,18 @@
               <a:rPr lang="en-US" sz="1000" dirty="0">
                 <a:latin typeface="HSE Sans" panose="02000000000000000000" pitchFamily="2" charset="0"/>
               </a:rPr>
-              <a:t>Self-Evolving LLM Agents via Reflective Prompt and Tool-Schema Patching</a:t>
+              <a:t>Automatically Evolving Multi-Turn</a:t>
+            </a:r>
+            <a:br>
+              <a:rPr lang="en-US" sz="1000" dirty="0">
+                <a:latin typeface="HSE Sans" panose="02000000000000000000" pitchFamily="2" charset="0"/>
+              </a:rPr>
+            </a:br>
+            <a:r>
+              <a:rPr lang="en-US" sz="1000" dirty="0">
+                <a:latin typeface="HSE Sans" panose="02000000000000000000" pitchFamily="2" charset="0"/>
+              </a:rPr>
+              <a:t>Customer Service AI Agents via Prompt-Level Distillation</a:t>
             </a:r>
           </a:p>
         </p:txBody>
@@ -23493,7 +24281,7 @@
         <p:spPr>
           <a:xfrm>
             <a:off x="3365627" y="497315"/>
-            <a:ext cx="2346745" cy="400110"/>
+            <a:ext cx="2346745" cy="553998"/>
           </a:xfrm>
           <a:prstGeom prst="rect">
             <a:avLst/>
@@ -23510,7 +24298,18 @@
               <a:rPr lang="en-US" sz="1000" dirty="0">
                 <a:latin typeface="HSE Sans" panose="02000000000000000000" pitchFamily="2" charset="0"/>
               </a:rPr>
-              <a:t>Self-Evolving LLM Agents via Reflective Prompt and Tool-Schema Patching</a:t>
+              <a:t>Automatically Evolving Multi-Turn</a:t>
+            </a:r>
+            <a:br>
+              <a:rPr lang="en-US" sz="1000" dirty="0">
+                <a:latin typeface="HSE Sans" panose="02000000000000000000" pitchFamily="2" charset="0"/>
+              </a:rPr>
+            </a:br>
+            <a:r>
+              <a:rPr lang="en-US" sz="1000" dirty="0">
+                <a:latin typeface="HSE Sans" panose="02000000000000000000" pitchFamily="2" charset="0"/>
+              </a:rPr>
+              <a:t>Customer Service AI Agents via Prompt-Level Distillation</a:t>
             </a:r>
           </a:p>
         </p:txBody>
@@ -23992,7 +24791,7 @@
         <p:spPr>
           <a:xfrm>
             <a:off x="3365627" y="497315"/>
-            <a:ext cx="2346745" cy="400110"/>
+            <a:ext cx="2346745" cy="553998"/>
           </a:xfrm>
           <a:prstGeom prst="rect">
             <a:avLst/>
@@ -24009,7 +24808,18 @@
               <a:rPr lang="en-US" sz="1000" dirty="0">
                 <a:latin typeface="HSE Sans" panose="02000000000000000000" pitchFamily="2" charset="0"/>
               </a:rPr>
-              <a:t>Self-Evolving LLM Agents via Reflective Prompt and Tool-Schema Patching</a:t>
+              <a:t>Automatically Evolving Multi-Turn</a:t>
+            </a:r>
+            <a:br>
+              <a:rPr lang="en-US" sz="1000" dirty="0">
+                <a:latin typeface="HSE Sans" panose="02000000000000000000" pitchFamily="2" charset="0"/>
+              </a:rPr>
+            </a:br>
+            <a:r>
+              <a:rPr lang="en-US" sz="1000" dirty="0">
+                <a:latin typeface="HSE Sans" panose="02000000000000000000" pitchFamily="2" charset="0"/>
+              </a:rPr>
+              <a:t>Customer Service AI Agents via Prompt-Level Distillation</a:t>
             </a:r>
           </a:p>
         </p:txBody>
@@ -25404,7 +26214,7 @@
         <p:spPr>
           <a:xfrm>
             <a:off x="3365627" y="497315"/>
-            <a:ext cx="2346745" cy="400110"/>
+            <a:ext cx="2346745" cy="553998"/>
           </a:xfrm>
           <a:prstGeom prst="rect">
             <a:avLst/>
@@ -25421,7 +26231,18 @@
               <a:rPr lang="en-US" sz="1000" dirty="0">
                 <a:latin typeface="HSE Sans" panose="02000000000000000000" pitchFamily="2" charset="0"/>
               </a:rPr>
-              <a:t>Self-Evolving LLM Agents via Reflective Prompt and Tool-Schema Patching</a:t>
+              <a:t>Automatically Evolving Multi-Turn</a:t>
+            </a:r>
+            <a:br>
+              <a:rPr lang="en-US" sz="1000" dirty="0">
+                <a:latin typeface="HSE Sans" panose="02000000000000000000" pitchFamily="2" charset="0"/>
+              </a:rPr>
+            </a:br>
+            <a:r>
+              <a:rPr lang="en-US" sz="1000" dirty="0">
+                <a:latin typeface="HSE Sans" panose="02000000000000000000" pitchFamily="2" charset="0"/>
+              </a:rPr>
+              <a:t>Customer Service AI Agents via Prompt-Level Distillation</a:t>
             </a:r>
           </a:p>
         </p:txBody>
@@ -26484,7 +27305,7 @@
         <p:spPr>
           <a:xfrm>
             <a:off x="3365627" y="497315"/>
-            <a:ext cx="2346745" cy="400110"/>
+            <a:ext cx="2346745" cy="553998"/>
           </a:xfrm>
           <a:prstGeom prst="rect">
             <a:avLst/>
@@ -26501,7 +27322,18 @@
               <a:rPr lang="en-US" sz="1000" dirty="0">
                 <a:latin typeface="HSE Sans" panose="02000000000000000000" pitchFamily="2" charset="0"/>
               </a:rPr>
-              <a:t>Self-Evolving LLM Agents via Reflective Prompt and Tool-Schema Patching</a:t>
+              <a:t>Automatically Evolving Multi-Turn</a:t>
+            </a:r>
+            <a:br>
+              <a:rPr lang="en-US" sz="1000" dirty="0">
+                <a:latin typeface="HSE Sans" panose="02000000000000000000" pitchFamily="2" charset="0"/>
+              </a:rPr>
+            </a:br>
+            <a:r>
+              <a:rPr lang="en-US" sz="1000" dirty="0">
+                <a:latin typeface="HSE Sans" panose="02000000000000000000" pitchFamily="2" charset="0"/>
+              </a:rPr>
+              <a:t>Customer Service AI Agents via Prompt-Level Distillation</a:t>
             </a:r>
           </a:p>
         </p:txBody>
